--- a/presentation/presentation.pptx
+++ b/presentation/presentation.pptx
@@ -4,6 +4,9 @@
   <p:sldMasterIdLst>
     <p:sldMasterId id="2147483648" r:id="rId1"/>
   </p:sldMasterIdLst>
+  <p:notesMasterIdLst>
+    <p:notesMasterId r:id="rId15"/>
+  </p:notesMasterIdLst>
   <p:sldIdLst>
     <p:sldId id="256" r:id="rId2"/>
     <p:sldId id="257" r:id="rId3"/>
@@ -19,9 +22,6 @@
     <p:sldId id="267" r:id="rId13"/>
     <p:sldId id="268" r:id="rId14"/>
   </p:sldIdLst>
-  <p:notesMasterIdLst>
-    <p:notesMasterId r:id="rId15"/>
-  </p:notesMasterIdLst>
   <p:sldSz cx="12192000" cy="6858000"/>
   <p:notesSz cx="6858000" cy="12192000"/>
   <p:defaultTextStyle>
@@ -116,13 +116,20 @@
       </a:defRPr>
     </a:lvl9pPr>
   </p:defaultTextStyle>
+  <p:extLst>
+    <p:ext uri="{EFAFB233-063F-42B5-8137-9DF3F51BA10A}">
+      <p15:sldGuideLst xmlns:p15="http://schemas.microsoft.com/office/powerpoint/2012/main"/>
+    </p:ext>
+  </p:extLst>
 </p:presentation>
 </file>
 
 <file path=ppt/charts/chart1.xml><?xml version="1.0" encoding="utf-8"?>
 <c:chartSpace xmlns:c="http://schemas.openxmlformats.org/drawingml/2006/chart" xmlns:a="http://schemas.openxmlformats.org/drawingml/2006/main" xmlns:r="http://schemas.openxmlformats.org/officeDocument/2006/relationships">
   <c:date1904 val="0"/>
+  <c:lang val="ru-RU"/>
   <c:roundedCorners val="0"/>
+  <c:style val="2"/>
   <c:chart>
     <c:autoTitleDeleted val="1"/>
     <c:plotArea>
@@ -152,69 +159,43 @@
             <a:effectLst/>
           </c:spPr>
           <c:invertIfNegative val="0"/>
-          <c:dLbls>
-            <c:numFmt formatCode="#,##0" sourceLinked="0"/>
-            <c:txPr>
-              <a:bodyPr/>
-              <a:lstStyle/>
-              <a:p>
-                <a:pPr>
-                  <a:defRPr b="0" i="0" strike="noStrike" sz="1200" u="none">
-                    <a:solidFill>
-                      <a:srgbClr val="000000"/>
-                    </a:solidFill>
-                    <a:latin typeface="Arial"/>
-                  </a:defRPr>
-                </a:pPr>
-              </a:p>
-            </c:txPr>
-            <c:showLegendKey val="0"/>
-            <c:showVal val="0"/>
-            <c:showCatName val="0"/>
-            <c:showSerName val="0"/>
-            <c:showPercent val="0"/>
-            <c:showBubbleSize val="0"/>
-            <c:showLeaderLines val="0"/>
-          </c:dLbls>
           <c:cat>
-            <c:multiLvlStrRef>
+            <c:strRef>
               <c:f>Sheet1!$A$2:$A$11</c:f>
-              <c:multiLvlStrCache>
+              <c:strCache>
                 <c:ptCount val="10"/>
-                <c:lvl>
-                  <c:pt idx="0">
-                    <c:v>air_cond</c:v>
-                  </c:pt>
-                  <c:pt idx="1">
-                    <c:v>car_horn</c:v>
-                  </c:pt>
-                  <c:pt idx="2">
-                    <c:v>children</c:v>
-                  </c:pt>
-                  <c:pt idx="3">
-                    <c:v>dog_bark</c:v>
-                  </c:pt>
-                  <c:pt idx="4">
-                    <c:v>drilling</c:v>
-                  </c:pt>
-                  <c:pt idx="5">
-                    <c:v>engine</c:v>
-                  </c:pt>
-                  <c:pt idx="6">
-                    <c:v>gun_shot</c:v>
-                  </c:pt>
-                  <c:pt idx="7">
-                    <c:v>jackham</c:v>
-                  </c:pt>
-                  <c:pt idx="8">
-                    <c:v>siren</c:v>
-                  </c:pt>
-                  <c:pt idx="9">
-                    <c:v>street_m</c:v>
-                  </c:pt>
-                </c:lvl>
-              </c:multiLvlStrCache>
-            </c:multiLvlStrRef>
+                <c:pt idx="0">
+                  <c:v>air_cond</c:v>
+                </c:pt>
+                <c:pt idx="1">
+                  <c:v>car_horn</c:v>
+                </c:pt>
+                <c:pt idx="2">
+                  <c:v>children</c:v>
+                </c:pt>
+                <c:pt idx="3">
+                  <c:v>dog_bark</c:v>
+                </c:pt>
+                <c:pt idx="4">
+                  <c:v>drilling</c:v>
+                </c:pt>
+                <c:pt idx="5">
+                  <c:v>engine</c:v>
+                </c:pt>
+                <c:pt idx="6">
+                  <c:v>gun_shot</c:v>
+                </c:pt>
+                <c:pt idx="7">
+                  <c:v>jackham</c:v>
+                </c:pt>
+                <c:pt idx="8">
+                  <c:v>siren</c:v>
+                </c:pt>
+                <c:pt idx="9">
+                  <c:v>street_m</c:v>
+                </c:pt>
+              </c:strCache>
+            </c:strRef>
           </c:cat>
           <c:val>
             <c:numRef>
@@ -257,37 +238,19 @@
           </c:val>
         </c:ser>
         <c:dLbls>
-          <c:numFmt formatCode="#,##0" sourceLinked="0"/>
-          <c:txPr>
-            <a:bodyPr/>
-            <a:lstStyle/>
-            <a:p>
-              <a:pPr>
-                <a:defRPr b="0" i="0" strike="noStrike" sz="1200" u="none">
-                  <a:solidFill>
-                    <a:srgbClr val="000000"/>
-                  </a:solidFill>
-                  <a:latin typeface="Arial"/>
-                </a:defRPr>
-              </a:pPr>
-            </a:p>
-          </c:txPr>
           <c:showLegendKey val="0"/>
           <c:showVal val="0"/>
           <c:showCatName val="0"/>
           <c:showSerName val="0"/>
           <c:showPercent val="0"/>
           <c:showBubbleSize val="0"/>
-          <c:showLeaderLines val="0"/>
         </c:dLbls>
         <c:gapWidth val="150"/>
-        <c:overlap val="0"/>
-        <c:axId val="2094734554"/>
-        <c:axId val="2094734552"/>
-        <c:axId val="2094734556"/>
+        <c:axId val="-314063248"/>
+        <c:axId val="-314055088"/>
       </c:barChart>
       <c:catAx>
-        <c:axId val="2094734554"/>
+        <c:axId val="-314063248"/>
         <c:scaling>
           <c:orientation val="minMax"/>
         </c:scaling>
@@ -318,17 +281,18 @@
                 <a:latin typeface="Arial"/>
               </a:defRPr>
             </a:pPr>
-            <a:endParaRPr lang="en-US"/>
+            <a:endParaRPr lang="ru-RU"/>
           </a:p>
         </c:txPr>
-        <c:crossAx val="2094734552"/>
+        <c:crossAx val="-314055088"/>
         <c:crosses val="autoZero"/>
         <c:auto val="1"/>
         <c:lblAlgn val="ctr"/>
+        <c:lblOffset val="100"/>
         <c:noMultiLvlLbl val="1"/>
       </c:catAx>
       <c:valAx>
-        <c:axId val="2094734552"/>
+        <c:axId val="-314055088"/>
         <c:scaling>
           <c:orientation val="minMax"/>
         </c:scaling>
@@ -370,10 +334,10 @@
                 <a:latin typeface="Arial"/>
               </a:defRPr>
             </a:pPr>
-            <a:endParaRPr lang="en-US"/>
+            <a:endParaRPr lang="ru-RU"/>
           </a:p>
         </c:txPr>
-        <c:crossAx val="2094734554"/>
+        <c:crossAx val="-314063248"/>
         <c:crosses val="autoZero"/>
         <c:crossBetween val="between"/>
       </c:valAx>
@@ -387,6 +351,7 @@
     </c:plotArea>
     <c:plotVisOnly val="1"/>
     <c:dispBlanksAs val="span"/>
+    <c:showDLblsOverMax val="1"/>
   </c:chart>
   <c:spPr>
     <a:solidFill>
@@ -425,234 +390,10 @@
           <a:chExt cx="0" cy="0"/>
         </a:xfrm>
       </p:grpSpPr>
-      <p:sp>
-        <p:nvSpPr>
-          <p:cNvPr id="2" name="Header Placeholder 1"/>
-          <p:cNvSpPr>
-            <a:spLocks noGrp="1"/>
-          </p:cNvSpPr>
-          <p:nvPr>
-            <p:ph type="hdr" sz="quarter"/>
-          </p:nvPr>
-        </p:nvSpPr>
-        <p:spPr>
-          <a:xfrm>
-            <a:off x="0" y="0"/>
-            <a:ext cx="2971800" cy="458788"/>
-          </a:xfrm>
-          <a:prstGeom prst="rect">
-            <a:avLst/>
-          </a:prstGeom>
-        </p:spPr>
-        <p:txBody>
-          <a:bodyPr vert="horz" lIns="91440" tIns="45720" rIns="91440" bIns="45720" rtlCol="0"/>
-          <a:lstStyle>
-            <a:lvl1pPr algn="l">
-              <a:defRPr sz="1200"/>
-            </a:lvl1pPr>
-          </a:lstStyle>
-          <a:p>
-            <a:endParaRPr lang="en-US"/>
-          </a:p>
-        </p:txBody>
-      </p:sp>
-      <p:sp>
-        <p:nvSpPr>
-          <p:cNvPr id="3" name="Date Placeholder 2"/>
-          <p:cNvSpPr>
-            <a:spLocks noGrp="1"/>
-          </p:cNvSpPr>
-          <p:nvPr>
-            <p:ph type="dt" idx="1"/>
-          </p:nvPr>
-        </p:nvSpPr>
-        <p:spPr>
-          <a:xfrm>
-            <a:off x="3884613" y="0"/>
-            <a:ext cx="2971800" cy="458788"/>
-          </a:xfrm>
-          <a:prstGeom prst="rect">
-            <a:avLst/>
-          </a:prstGeom>
-        </p:spPr>
-        <p:txBody>
-          <a:bodyPr vert="horz" lIns="91440" tIns="45720" rIns="91440" bIns="45720" rtlCol="0"/>
-          <a:lstStyle>
-            <a:lvl1pPr algn="r">
-              <a:defRPr sz="1200"/>
-            </a:lvl1pPr>
-          </a:lstStyle>
-          <a:p>
-            <a:fld id="{5282F153-3F37-0F45-9E97-73ACFA13230C}" type="datetimeFigureOut">
-              <a:rPr lang="en-US"/>
-              <a:t>7/23/19</a:t>
-            </a:fld>
-            <a:endParaRPr lang="en-US"/>
-          </a:p>
-        </p:txBody>
-      </p:sp>
-      <p:sp>
-        <p:nvSpPr>
-          <p:cNvPr id="4" name="Slide Image Placeholder 3"/>
-          <p:cNvSpPr>
-            <a:spLocks noGrp="1" noRot="1" noChangeAspect="1"/>
-          </p:cNvSpPr>
-          <p:nvPr>
-            <p:ph type="sldImg" idx="2"/>
-          </p:nvPr>
-        </p:nvSpPr>
-        <p:spPr>
-          <a:xfrm>
-            <a:off x="685800" y="1143000"/>
-            <a:ext cx="5486400" cy="3086100"/>
-          </a:xfrm>
-          <a:prstGeom prst="rect">
-            <a:avLst/>
-          </a:prstGeom>
-          <a:noFill/>
-          <a:ln w="12700">
-            <a:solidFill>
-              <a:prstClr val="black"/>
-            </a:solidFill>
-          </a:ln>
-        </p:spPr>
-        <p:txBody>
-          <a:bodyPr vert="horz" lIns="91440" tIns="45720" rIns="91440" bIns="45720" rtlCol="0" anchor="ctr"/>
-          <a:lstStyle/>
-          <a:p>
-            <a:endParaRPr lang="en-US"/>
-          </a:p>
-        </p:txBody>
-      </p:sp>
-      <p:sp>
-        <p:nvSpPr>
-          <p:cNvPr id="5" name="Notes Placeholder 4"/>
-          <p:cNvSpPr>
-            <a:spLocks noGrp="1"/>
-          </p:cNvSpPr>
-          <p:nvPr>
-            <p:ph type="body" sz="quarter" idx="3"/>
-          </p:nvPr>
-        </p:nvSpPr>
-        <p:spPr>
-          <a:xfrm>
-            <a:off x="685800" y="4400550"/>
-            <a:ext cx="5486400" cy="3600450"/>
-          </a:xfrm>
-          <a:prstGeom prst="rect">
-            <a:avLst/>
-          </a:prstGeom>
-        </p:spPr>
-        <p:txBody>
-          <a:bodyPr vert="horz" lIns="91440" tIns="45720" rIns="91440" bIns="45720" rtlCol="0"/>
-          <a:lstStyle/>
-          <a:p>
-            <a:pPr lvl="0"/>
-            <a:r>
-              <a:rPr lang="en-US"/>
-              <a:t>Click to edit Master text styles</a:t>
-            </a:r>
-          </a:p>
-          <a:p>
-            <a:pPr lvl="1"/>
-            <a:r>
-              <a:rPr lang="en-US"/>
-              <a:t>Second level</a:t>
-            </a:r>
-          </a:p>
-          <a:p>
-            <a:pPr lvl="2"/>
-            <a:r>
-              <a:rPr lang="en-US"/>
-              <a:t>Third level</a:t>
-            </a:r>
-          </a:p>
-          <a:p>
-            <a:pPr lvl="3"/>
-            <a:r>
-              <a:rPr lang="en-US"/>
-              <a:t>Fourth level</a:t>
-            </a:r>
-          </a:p>
-          <a:p>
-            <a:pPr lvl="4"/>
-            <a:r>
-              <a:rPr lang="en-US"/>
-              <a:t>Fifth level</a:t>
-            </a:r>
-          </a:p>
-        </p:txBody>
-      </p:sp>
-      <p:sp>
-        <p:nvSpPr>
-          <p:cNvPr id="6" name="Footer Placeholder 5"/>
-          <p:cNvSpPr>
-            <a:spLocks noGrp="1"/>
-          </p:cNvSpPr>
-          <p:nvPr>
-            <p:ph type="ftr" sz="quarter" idx="4"/>
-          </p:nvPr>
-        </p:nvSpPr>
-        <p:spPr>
-          <a:xfrm>
-            <a:off x="0" y="8685213"/>
-            <a:ext cx="2971800" cy="458787"/>
-          </a:xfrm>
-          <a:prstGeom prst="rect">
-            <a:avLst/>
-          </a:prstGeom>
-        </p:spPr>
-        <p:txBody>
-          <a:bodyPr vert="horz" lIns="91440" tIns="45720" rIns="91440" bIns="45720" rtlCol="0" anchor="b"/>
-          <a:lstStyle>
-            <a:lvl1pPr algn="l">
-              <a:defRPr sz="1200"/>
-            </a:lvl1pPr>
-          </a:lstStyle>
-          <a:p>
-            <a:endParaRPr lang="en-US"/>
-          </a:p>
-        </p:txBody>
-      </p:sp>
-      <p:sp>
-        <p:nvSpPr>
-          <p:cNvPr id="7" name="Slide Number Placeholder 6"/>
-          <p:cNvSpPr>
-            <a:spLocks noGrp="1"/>
-          </p:cNvSpPr>
-          <p:nvPr>
-            <p:ph type="sldNum" sz="quarter" idx="5"/>
-          </p:nvPr>
-        </p:nvSpPr>
-        <p:spPr>
-          <a:xfrm>
-            <a:off x="3884613" y="8685213"/>
-            <a:ext cx="2971800" cy="458787"/>
-          </a:xfrm>
-          <a:prstGeom prst="rect">
-            <a:avLst/>
-          </a:prstGeom>
-        </p:spPr>
-        <p:txBody>
-          <a:bodyPr vert="horz" lIns="91440" tIns="45720" rIns="91440" bIns="45720" rtlCol="0" anchor="b"/>
-          <a:lstStyle>
-            <a:lvl1pPr algn="r">
-              <a:defRPr sz="1200"/>
-            </a:lvl1pPr>
-          </a:lstStyle>
-          <a:p>
-            <a:fld id="{CE5E9CC1-C706-0F49-92D6-E571CC5EEA8F}" type="slidenum">
-              <a:rPr lang="en-US"/>
-              <a:t>‹#›</a:t>
-            </a:fld>
-            <a:endParaRPr lang="en-US"/>
-          </a:p>
-        </p:txBody>
-      </p:sp>
     </p:spTree>
     <p:extLst>
       <p:ext uri="{BB962C8B-B14F-4D97-AF65-F5344CB8AC3E}">
-        <p14:creationId xmlns:p14="http://schemas.microsoft.com/office/powerpoint/2010/main" val="1024086991"/>
+        <p14:creationId xmlns:p14="http://schemas.microsoft.com/office/powerpoint/2010/main" val="210402897"/>
       </p:ext>
     </p:extLst>
   </p:cSld>
@@ -796,10 +537,6 @@
           <a:bodyPr/>
           <a:lstStyle/>
           <a:p>
-            <a:r>
-              <a:rPr lang="en-US" dirty="0"/>
-              <a:t/>
-            </a:r>
             <a:endParaRPr lang="en-US" dirty="0"/>
           </a:p>
         </p:txBody>
@@ -884,10 +621,6 @@
           <a:bodyPr/>
           <a:lstStyle/>
           <a:p>
-            <a:r>
-              <a:rPr lang="en-US" dirty="0"/>
-              <a:t/>
-            </a:r>
             <a:endParaRPr lang="en-US" dirty="0"/>
           </a:p>
         </p:txBody>
@@ -972,10 +705,6 @@
           <a:bodyPr/>
           <a:lstStyle/>
           <a:p>
-            <a:r>
-              <a:rPr lang="en-US" dirty="0"/>
-              <a:t/>
-            </a:r>
             <a:endParaRPr lang="en-US" dirty="0"/>
           </a:p>
         </p:txBody>
@@ -1060,10 +789,6 @@
           <a:bodyPr/>
           <a:lstStyle/>
           <a:p>
-            <a:r>
-              <a:rPr lang="en-US" dirty="0"/>
-              <a:t/>
-            </a:r>
             <a:endParaRPr lang="en-US" dirty="0"/>
           </a:p>
         </p:txBody>
@@ -1148,10 +873,6 @@
           <a:bodyPr/>
           <a:lstStyle/>
           <a:p>
-            <a:r>
-              <a:rPr lang="en-US" dirty="0"/>
-              <a:t/>
-            </a:r>
             <a:endParaRPr lang="en-US" dirty="0"/>
           </a:p>
         </p:txBody>
@@ -1236,10 +957,6 @@
           <a:bodyPr/>
           <a:lstStyle/>
           <a:p>
-            <a:r>
-              <a:rPr lang="en-US" dirty="0"/>
-              <a:t/>
-            </a:r>
             <a:endParaRPr lang="en-US" dirty="0"/>
           </a:p>
         </p:txBody>
@@ -1324,10 +1041,6 @@
           <a:bodyPr/>
           <a:lstStyle/>
           <a:p>
-            <a:r>
-              <a:rPr lang="en-US" dirty="0"/>
-              <a:t/>
-            </a:r>
             <a:endParaRPr lang="en-US" dirty="0"/>
           </a:p>
         </p:txBody>
@@ -1412,10 +1125,6 @@
           <a:bodyPr/>
           <a:lstStyle/>
           <a:p>
-            <a:r>
-              <a:rPr lang="en-US" dirty="0"/>
-              <a:t/>
-            </a:r>
             <a:endParaRPr lang="en-US" dirty="0"/>
           </a:p>
         </p:txBody>
@@ -1500,10 +1209,6 @@
           <a:bodyPr/>
           <a:lstStyle/>
           <a:p>
-            <a:r>
-              <a:rPr lang="en-US" dirty="0"/>
-              <a:t/>
-            </a:r>
             <a:endParaRPr lang="en-US" dirty="0"/>
           </a:p>
         </p:txBody>
@@ -1588,10 +1293,6 @@
           <a:bodyPr/>
           <a:lstStyle/>
           <a:p>
-            <a:r>
-              <a:rPr lang="en-US" dirty="0"/>
-              <a:t/>
-            </a:r>
             <a:endParaRPr lang="en-US" dirty="0"/>
           </a:p>
         </p:txBody>
@@ -1676,10 +1377,6 @@
           <a:bodyPr/>
           <a:lstStyle/>
           <a:p>
-            <a:r>
-              <a:rPr lang="en-US" dirty="0"/>
-              <a:t/>
-            </a:r>
             <a:endParaRPr lang="en-US" dirty="0"/>
           </a:p>
         </p:txBody>
@@ -1764,10 +1461,6 @@
           <a:bodyPr/>
           <a:lstStyle/>
           <a:p>
-            <a:r>
-              <a:rPr lang="en-US" dirty="0"/>
-              <a:t/>
-            </a:r>
             <a:endParaRPr lang="en-US" dirty="0"/>
           </a:p>
         </p:txBody>
@@ -1852,10 +1545,6 @@
           <a:bodyPr/>
           <a:lstStyle/>
           <a:p>
-            <a:r>
-              <a:rPr lang="en-US" dirty="0"/>
-              <a:t/>
-            </a:r>
             <a:endParaRPr lang="en-US" dirty="0"/>
           </a:p>
         </p:txBody>
@@ -1929,6 +1618,11 @@
 <file path=ppt/slideMasters/slideMaster1.xml><?xml version="1.0" encoding="utf-8"?>
 <p:sldMaster xmlns:a="http://schemas.openxmlformats.org/drawingml/2006/main" xmlns:r="http://schemas.openxmlformats.org/officeDocument/2006/relationships" xmlns:p="http://schemas.openxmlformats.org/presentationml/2006/main">
   <p:cSld>
+    <p:bg>
+      <p:bgRef idx="1001">
+        <a:schemeClr val="bg1"/>
+      </p:bgRef>
+    </p:bg>
     <p:spTree>
       <p:nvGrpSpPr>
         <p:cNvPr id="1" name=""/>
@@ -2211,6 +1905,7 @@
         <a:solidFill>
           <a:srgbClr val="FFFFFF"/>
         </a:solidFill>
+        <a:effectLst/>
       </p:bgPr>
     </p:bg>
     <p:spTree>
@@ -2298,11 +1993,11 @@
           <a:bodyPr wrap="square" rtlCol="0" anchor="ctr"/>
           <a:lstStyle/>
           <a:p>
-            <a:pPr indent="0" marL="0">
-              <a:buNone/>
-            </a:pPr>
-            <a:r>
-              <a:rPr lang="en-US" sz="1600" b="1" spc="400" kern="0" dirty="0">
+            <a:pPr marL="0" indent="0">
+              <a:buNone/>
+            </a:pPr>
+            <a:r>
+              <a:rPr lang="en-US" sz="1600" b="1" kern="0" spc="400" dirty="0">
                 <a:solidFill>
                   <a:srgbClr val="5B8FB9"/>
                 </a:solidFill>
@@ -2337,7 +2032,7 @@
           <a:bodyPr wrap="square" rtlCol="0" anchor="ctr"/>
           <a:lstStyle/>
           <a:p>
-            <a:pPr indent="0" marL="0">
+            <a:pPr marL="0" indent="0">
               <a:buNone/>
             </a:pPr>
             <a:r>
@@ -2363,7 +2058,7 @@
         </p:nvSpPr>
         <p:spPr>
           <a:xfrm>
-            <a:off x="822960" y="2743200"/>
+            <a:off x="822960" y="3108959"/>
             <a:ext cx="9144000" cy="640080"/>
           </a:xfrm>
           <a:prstGeom prst="rect">
@@ -2376,7 +2071,7 @@
           <a:bodyPr wrap="square" rtlCol="0" anchor="ctr"/>
           <a:lstStyle/>
           <a:p>
-            <a:pPr indent="0" marL="0">
+            <a:pPr marL="0" indent="0">
               <a:buNone/>
             </a:pPr>
             <a:r>
@@ -2415,7 +2110,7 @@
           <a:bodyPr wrap="square" rtlCol="0" anchor="ctr"/>
           <a:lstStyle/>
           <a:p>
-            <a:pPr indent="0" marL="0">
+            <a:pPr marL="0" indent="0">
               <a:buNone/>
             </a:pPr>
             <a:r>
@@ -2429,9 +2124,6 @@
               </a:rPr>
               <a:t>Сравнение собственной 2D-CNN и дотюненной </a:t>
             </a:r>
-            <a:pPr indent="0" marL="0">
-              <a:buNone/>
-            </a:pPr>
             <a:r>
               <a:rPr lang="en-US" sz="1600" b="1" dirty="0">
                 <a:solidFill>
@@ -2443,9 +2135,6 @@
               </a:rPr>
               <a:t>PANN CNN10</a:t>
             </a:r>
-            <a:pPr indent="0" marL="0">
-              <a:buNone/>
-            </a:pPr>
             <a:r>
               <a:rPr lang="en-US" sz="1600" dirty="0">
                 <a:solidFill>
@@ -2505,7 +2194,7 @@
           <a:bodyPr wrap="square" rtlCol="0" anchor="ctr"/>
           <a:lstStyle/>
           <a:p>
-            <a:pPr indent="0" marL="0">
+            <a:pPr marL="0" indent="0">
               <a:buNone/>
             </a:pPr>
             <a:r>
@@ -2544,7 +2233,7 @@
           <a:bodyPr wrap="square" rtlCol="0" anchor="ctr"/>
           <a:lstStyle/>
           <a:p>
-            <a:pPr indent="0" marL="0">
+            <a:pPr marL="0" indent="0">
               <a:buNone/>
             </a:pPr>
             <a:r>
@@ -2583,7 +2272,7 @@
           <a:bodyPr wrap="square" rtlCol="0" anchor="ctr"/>
           <a:lstStyle/>
           <a:p>
-            <a:pPr indent="0" marL="0">
+            <a:pPr marL="0" indent="0">
               <a:buNone/>
             </a:pPr>
             <a:r>
@@ -2617,6 +2306,7 @@
         <a:solidFill>
           <a:srgbClr val="FFFFFF"/>
         </a:solidFill>
+        <a:effectLst/>
       </p:bgPr>
     </p:bg>
     <p:spTree>
@@ -2654,7 +2344,7 @@
           <a:bodyPr wrap="square" lIns="0" tIns="0" rIns="0" bIns="0" rtlCol="0" anchor="ctr"/>
           <a:lstStyle/>
           <a:p>
-            <a:pPr indent="0" marL="0">
+            <a:pPr marL="0" indent="0">
               <a:buNone/>
             </a:pPr>
             <a:r>
@@ -2693,7 +2383,7 @@
           <a:bodyPr wrap="square" lIns="0" tIns="0" rIns="0" bIns="0" rtlCol="0" anchor="ctr"/>
           <a:lstStyle/>
           <a:p>
-            <a:pPr indent="0" marL="0">
+            <a:pPr marL="0" indent="0">
               <a:buNone/>
             </a:pPr>
             <a:r>
@@ -2720,7 +2410,7 @@
         <p:spPr>
           <a:xfrm>
             <a:off x="457200" y="1691640"/>
-            <a:ext cx="3657600" cy="1920240"/>
+            <a:ext cx="3657600" cy="2286000"/>
           </a:xfrm>
           <a:prstGeom prst="roundRect">
             <a:avLst>
@@ -2784,7 +2474,7 @@
           <a:bodyPr wrap="square" rtlCol="0" anchor="ctr"/>
           <a:lstStyle/>
           <a:p>
-            <a:pPr indent="0" marL="0">
+            <a:pPr marL="0" indent="0">
               <a:buNone/>
             </a:pPr>
             <a:r>
@@ -2823,7 +2513,7 @@
           <a:bodyPr wrap="square" rtlCol="0" anchor="ctr"/>
           <a:lstStyle/>
           <a:p>
-            <a:pPr algn="l" indent="0" marL="0">
+            <a:pPr marL="0" indent="0" algn="l">
               <a:buNone/>
             </a:pPr>
             <a:r>
@@ -2862,7 +2552,7 @@
           <a:bodyPr wrap="square" rtlCol="0" anchor="ctr"/>
           <a:lstStyle/>
           <a:p>
-            <a:pPr indent="0" marL="0">
+            <a:pPr marL="0" indent="0">
               <a:buNone/>
             </a:pPr>
             <a:r>
@@ -2901,7 +2591,7 @@
           <a:bodyPr wrap="square" rtlCol="0" anchor="ctr"/>
           <a:lstStyle/>
           <a:p>
-            <a:pPr indent="0" marL="0">
+            <a:pPr marL="0" indent="0">
               <a:buNone/>
             </a:pPr>
             <a:r>
@@ -2915,9 +2605,6 @@
               </a:rPr>
               <a:t>macro-F1:  </a:t>
             </a:r>
-            <a:pPr indent="0" marL="0">
-              <a:buNone/>
-            </a:pPr>
             <a:r>
               <a:rPr lang="en-US" sz="1100" b="1" dirty="0">
                 <a:solidFill>
@@ -2929,9 +2616,6 @@
               </a:rPr>
               <a:t>0.551</a:t>
             </a:r>
-            <a:pPr indent="0" marL="0">
-              <a:buNone/>
-            </a:pPr>
             <a:r>
               <a:rPr lang="en-US" sz="1100" dirty="0">
                 <a:solidFill>
@@ -2941,25 +2625,8 @@
                 <a:ea typeface="Calibri" pitchFamily="34" charset="-122"/>
                 <a:cs typeface="Calibri" pitchFamily="34" charset="-120"/>
               </a:rPr>
-              <a:t>    ·  </a:t>
-            </a:r>
-            <a:pPr indent="0" marL="0">
-              <a:buNone/>
-            </a:pPr>
-            <a:r>
-              <a:rPr lang="en-US" sz="1100" dirty="0">
-                <a:solidFill>
-                  <a:srgbClr val="7A7A7A"/>
-                </a:solidFill>
-                <a:latin typeface="Calibri" pitchFamily="34" charset="0"/>
-                <a:ea typeface="Calibri" pitchFamily="34" charset="-122"/>
-                <a:cs typeface="Calibri" pitchFamily="34" charset="-120"/>
-              </a:rPr>
-              <a:t>params:  </a:t>
-            </a:r>
-            <a:pPr indent="0" marL="0">
-              <a:buNone/>
-            </a:pPr>
+              <a:t>    ·  params:  </a:t>
+            </a:r>
             <a:r>
               <a:rPr lang="en-US" sz="1100" b="1" dirty="0">
                 <a:solidFill>
@@ -2996,7 +2663,7 @@
           <a:bodyPr wrap="square" rtlCol="0" anchor="ctr"/>
           <a:lstStyle/>
           <a:p>
-            <a:pPr indent="0" marL="0">
+            <a:pPr marL="0" indent="0">
               <a:buNone/>
             </a:pPr>
             <a:r>
@@ -3023,7 +2690,7 @@
         <p:spPr>
           <a:xfrm>
             <a:off x="4251960" y="1691640"/>
-            <a:ext cx="3657600" cy="1920240"/>
+            <a:ext cx="3611880" cy="2286000"/>
           </a:xfrm>
           <a:prstGeom prst="roundRect">
             <a:avLst>
@@ -3087,7 +2754,7 @@
           <a:bodyPr wrap="square" rtlCol="0" anchor="ctr"/>
           <a:lstStyle/>
           <a:p>
-            <a:pPr indent="0" marL="0">
+            <a:pPr marL="0" indent="0">
               <a:buNone/>
             </a:pPr>
             <a:r>
@@ -3126,7 +2793,7 @@
           <a:bodyPr wrap="square" rtlCol="0" anchor="ctr"/>
           <a:lstStyle/>
           <a:p>
-            <a:pPr algn="l" indent="0" marL="0">
+            <a:pPr marL="0" indent="0" algn="l">
               <a:buNone/>
             </a:pPr>
             <a:r>
@@ -3165,7 +2832,7 @@
           <a:bodyPr wrap="square" rtlCol="0" anchor="ctr"/>
           <a:lstStyle/>
           <a:p>
-            <a:pPr indent="0" marL="0">
+            <a:pPr marL="0" indent="0">
               <a:buNone/>
             </a:pPr>
             <a:r>
@@ -3204,7 +2871,7 @@
           <a:bodyPr wrap="square" rtlCol="0" anchor="ctr"/>
           <a:lstStyle/>
           <a:p>
-            <a:pPr indent="0" marL="0">
+            <a:pPr marL="0" indent="0">
               <a:buNone/>
             </a:pPr>
             <a:r>
@@ -3218,9 +2885,6 @@
               </a:rPr>
               <a:t>macro-F1:  </a:t>
             </a:r>
-            <a:pPr indent="0" marL="0">
-              <a:buNone/>
-            </a:pPr>
             <a:r>
               <a:rPr lang="en-US" sz="1100" b="1" dirty="0">
                 <a:solidFill>
@@ -3232,9 +2896,6 @@
               </a:rPr>
               <a:t>0.806</a:t>
             </a:r>
-            <a:pPr indent="0" marL="0">
-              <a:buNone/>
-            </a:pPr>
             <a:r>
               <a:rPr lang="en-US" sz="1100" dirty="0">
                 <a:solidFill>
@@ -3244,25 +2905,8 @@
                 <a:ea typeface="Calibri" pitchFamily="34" charset="-122"/>
                 <a:cs typeface="Calibri" pitchFamily="34" charset="-120"/>
               </a:rPr>
-              <a:t>    ·  </a:t>
-            </a:r>
-            <a:pPr indent="0" marL="0">
-              <a:buNone/>
-            </a:pPr>
-            <a:r>
-              <a:rPr lang="en-US" sz="1100" dirty="0">
-                <a:solidFill>
-                  <a:srgbClr val="7A7A7A"/>
-                </a:solidFill>
-                <a:latin typeface="Calibri" pitchFamily="34" charset="0"/>
-                <a:ea typeface="Calibri" pitchFamily="34" charset="-122"/>
-                <a:cs typeface="Calibri" pitchFamily="34" charset="-120"/>
-              </a:rPr>
-              <a:t>params:  </a:t>
-            </a:r>
-            <a:pPr indent="0" marL="0">
-              <a:buNone/>
-            </a:pPr>
+              <a:t>    ·  params:  </a:t>
+            </a:r>
             <a:r>
               <a:rPr lang="en-US" sz="1100" b="1" dirty="0">
                 <a:solidFill>
@@ -3299,7 +2943,7 @@
           <a:bodyPr wrap="square" rtlCol="0" anchor="ctr"/>
           <a:lstStyle/>
           <a:p>
-            <a:pPr indent="0" marL="0">
+            <a:pPr marL="0" indent="0">
               <a:buNone/>
             </a:pPr>
             <a:r>
@@ -3326,7 +2970,7 @@
         <p:spPr>
           <a:xfrm>
             <a:off x="8046720" y="1691640"/>
-            <a:ext cx="3657600" cy="1920240"/>
+            <a:ext cx="3657600" cy="2286000"/>
           </a:xfrm>
           <a:prstGeom prst="roundRect">
             <a:avLst>
@@ -3390,7 +3034,7 @@
           <a:bodyPr wrap="square" rtlCol="0" anchor="ctr"/>
           <a:lstStyle/>
           <a:p>
-            <a:pPr indent="0" marL="0">
+            <a:pPr marL="0" indent="0">
               <a:buNone/>
             </a:pPr>
             <a:r>
@@ -3429,7 +3073,7 @@
           <a:bodyPr wrap="square" rtlCol="0" anchor="ctr"/>
           <a:lstStyle/>
           <a:p>
-            <a:pPr algn="l" indent="0" marL="0">
+            <a:pPr marL="0" indent="0" algn="l">
               <a:buNone/>
             </a:pPr>
             <a:r>
@@ -3468,7 +3112,7 @@
           <a:bodyPr wrap="square" rtlCol="0" anchor="ctr"/>
           <a:lstStyle/>
           <a:p>
-            <a:pPr indent="0" marL="0">
+            <a:pPr marL="0" indent="0">
               <a:buNone/>
             </a:pPr>
             <a:r>
@@ -3507,7 +3151,7 @@
           <a:bodyPr wrap="square" rtlCol="0" anchor="ctr"/>
           <a:lstStyle/>
           <a:p>
-            <a:pPr indent="0" marL="0">
+            <a:pPr marL="0" indent="0">
               <a:buNone/>
             </a:pPr>
             <a:r>
@@ -3521,9 +3165,6 @@
               </a:rPr>
               <a:t>macro-F1:  </a:t>
             </a:r>
-            <a:pPr indent="0" marL="0">
-              <a:buNone/>
-            </a:pPr>
             <a:r>
               <a:rPr lang="en-US" sz="1100" b="1" dirty="0">
                 <a:solidFill>
@@ -3535,9 +3176,6 @@
               </a:rPr>
               <a:t>0.729</a:t>
             </a:r>
-            <a:pPr indent="0" marL="0">
-              <a:buNone/>
-            </a:pPr>
             <a:r>
               <a:rPr lang="en-US" sz="1100" dirty="0">
                 <a:solidFill>
@@ -3547,25 +3185,8 @@
                 <a:ea typeface="Calibri" pitchFamily="34" charset="-122"/>
                 <a:cs typeface="Calibri" pitchFamily="34" charset="-120"/>
               </a:rPr>
-              <a:t>    ·  </a:t>
-            </a:r>
-            <a:pPr indent="0" marL="0">
-              <a:buNone/>
-            </a:pPr>
-            <a:r>
-              <a:rPr lang="en-US" sz="1100" dirty="0">
-                <a:solidFill>
-                  <a:srgbClr val="7A7A7A"/>
-                </a:solidFill>
-                <a:latin typeface="Calibri" pitchFamily="34" charset="0"/>
-                <a:ea typeface="Calibri" pitchFamily="34" charset="-122"/>
-                <a:cs typeface="Calibri" pitchFamily="34" charset="-120"/>
-              </a:rPr>
-              <a:t>params:  </a:t>
-            </a:r>
-            <a:pPr indent="0" marL="0">
-              <a:buNone/>
-            </a:pPr>
+              <a:t>    ·  params:  </a:t>
+            </a:r>
             <a:r>
               <a:rPr lang="en-US" sz="1100" b="1" dirty="0">
                 <a:solidFill>
@@ -3602,7 +3223,7 @@
           <a:bodyPr wrap="square" rtlCol="0" anchor="ctr"/>
           <a:lstStyle/>
           <a:p>
-            <a:pPr indent="0" marL="0">
+            <a:pPr marL="0" indent="0">
               <a:buNone/>
             </a:pPr>
             <a:r>
@@ -3622,15 +3243,15 @@
       </p:sp>
       <p:pic>
         <p:nvPicPr>
-          <p:cNvPr id="25" name="Image 0" descr="C:\Users\desswell\work\pythonProject\ЦОС\final_project\results\figures\per_class_f1_comparison.png">    </p:cNvPr>
+          <p:cNvPr id="25" name="Image 0" descr="C:\Users\desswell\work\pythonProject\ЦОС\final_project\results\figures\per_class_f1_comparison.png"/>
           <p:cNvPicPr>
             <a:picLocks noChangeAspect="1"/>
           </p:cNvPicPr>
           <p:nvPr/>
         </p:nvPicPr>
         <p:blipFill>
-          <a:blip r:embed="rId1"/>
-          <a:srcRect l="0" r="0" t="0" b="0"/>
+          <a:blip r:embed="rId3"/>
+          <a:srcRect/>
           <a:stretch/>
         </p:blipFill>
         <p:spPr>
@@ -3691,7 +3312,7 @@
           <a:bodyPr wrap="square" rtlCol="0" anchor="ctr"/>
           <a:lstStyle/>
           <a:p>
-            <a:pPr indent="0" marL="0">
+            <a:pPr marL="0" indent="0">
               <a:buNone/>
             </a:pPr>
             <a:r>
@@ -3730,7 +3351,7 @@
           <a:bodyPr wrap="square" rtlCol="0" anchor="ctr"/>
           <a:lstStyle/>
           <a:p>
-            <a:pPr indent="0" marL="0">
+            <a:pPr marL="0" indent="0">
               <a:spcAft>
                 <a:spcPts val="300"/>
               </a:spcAft>
@@ -3747,47 +3368,35 @@
               </a:rPr>
               <a:t>+21%</a:t>
             </a:r>
-            <a:pPr indent="0" marL="0">
+            <a:r>
+              <a:rPr lang="en-US" sz="1100" dirty="0">
+                <a:solidFill>
+                  <a:srgbClr val="2A2D34"/>
+                </a:solidFill>
+                <a:latin typeface="Calibri" pitchFamily="34" charset="0"/>
+                <a:ea typeface="Calibri" pitchFamily="34" charset="-122"/>
+                <a:cs typeface="Calibri" pitchFamily="34" charset="-120"/>
+              </a:rPr>
+              <a:t>  acc PANN над own CNN при том же препроцессинге</a:t>
+            </a:r>
+            <a:endParaRPr lang="en-US" sz="1800" dirty="0"/>
+          </a:p>
+          <a:p>
+            <a:pPr marL="0" indent="0">
               <a:spcAft>
                 <a:spcPts val="300"/>
               </a:spcAft>
               <a:buNone/>
             </a:pPr>
-            <a:r>
-              <a:rPr lang="en-US" sz="1100" dirty="0">
-                <a:solidFill>
-                  <a:srgbClr val="2A2D34"/>
-                </a:solidFill>
-                <a:latin typeface="Calibri" pitchFamily="34" charset="0"/>
-                <a:ea typeface="Calibri" pitchFamily="34" charset="-122"/>
-                <a:cs typeface="Calibri" pitchFamily="34" charset="-120"/>
-              </a:rPr>
-              <a:t>  acc PANN над own CNN при том же препроцессинге</a:t>
-            </a:r>
-            <a:pPr indent="0" marL="0">
+            <a:endParaRPr lang="en-US" sz="1800" dirty="0"/>
+          </a:p>
+          <a:p>
+            <a:pPr marL="0" indent="0">
               <a:spcAft>
                 <a:spcPts val="300"/>
               </a:spcAft>
               <a:buNone/>
             </a:pPr>
-            <a:endParaRPr lang="en-US" sz="1800" dirty="0"/>
-          </a:p>
-          <a:p>
-            <a:pPr indent="0" marL="0">
-              <a:spcAft>
-                <a:spcPts val="300"/>
-              </a:spcAft>
-              <a:buNone/>
-            </a:pPr>
-            <a:endParaRPr lang="en-US" sz="1800" dirty="0"/>
-          </a:p>
-          <a:p>
-            <a:pPr indent="0" marL="0">
-              <a:spcAft>
-                <a:spcPts val="300"/>
-              </a:spcAft>
-              <a:buNone/>
-            </a:pPr>
             <a:r>
               <a:rPr lang="en-US" sz="1400" b="1" dirty="0">
                 <a:solidFill>
@@ -3799,12 +3408,6 @@
               </a:rPr>
               <a:t>std 7%</a:t>
             </a:r>
-            <a:pPr indent="0" marL="0">
-              <a:spcAft>
-                <a:spcPts val="300"/>
-              </a:spcAft>
-              <a:buNone/>
-            </a:pPr>
             <a:r>
               <a:rPr lang="en-US" sz="1100" dirty="0">
                 <a:solidFill>
@@ -3841,7 +3444,7 @@
           <a:bodyPr wrap="square" rtlCol="0" anchor="ctr"/>
           <a:lstStyle/>
           <a:p>
-            <a:pPr indent="0" marL="0">
+            <a:pPr marL="0" indent="0">
               <a:buNone/>
             </a:pPr>
             <a:r>
@@ -3880,7 +3483,7 @@
           <a:bodyPr wrap="square" rtlCol="0" anchor="ctr"/>
           <a:lstStyle/>
           <a:p>
-            <a:pPr algn="r" indent="0" marL="0">
+            <a:pPr marL="0" indent="0" algn="r">
               <a:buNone/>
             </a:pPr>
             <a:r>
@@ -3914,6 +3517,7 @@
         <a:solidFill>
           <a:srgbClr val="FFFFFF"/>
         </a:solidFill>
+        <a:effectLst/>
       </p:bgPr>
     </p:bg>
     <p:spTree>
@@ -3951,7 +3555,7 @@
           <a:bodyPr wrap="square" lIns="0" tIns="0" rIns="0" bIns="0" rtlCol="0" anchor="ctr"/>
           <a:lstStyle/>
           <a:p>
-            <a:pPr indent="0" marL="0">
+            <a:pPr marL="0" indent="0">
               <a:buNone/>
             </a:pPr>
             <a:r>
@@ -3971,15 +3575,15 @@
       </p:sp>
       <p:pic>
         <p:nvPicPr>
-          <p:cNvPr id="3" name="Image 0" descr="C:\Users\desswell\work\pythonProject\ЦОС\final_project\results\figures\confusion_matrix_own_cnn_avg.png">    </p:cNvPr>
+          <p:cNvPr id="3" name="Image 0" descr="C:\Users\desswell\work\pythonProject\ЦОС\final_project\results\figures\confusion_matrix_own_cnn_avg.png"/>
           <p:cNvPicPr>
             <a:picLocks noChangeAspect="1"/>
           </p:cNvPicPr>
           <p:nvPr/>
         </p:nvPicPr>
         <p:blipFill>
-          <a:blip r:embed="rId1"/>
-          <a:srcRect l="0" r="0" t="0" b="0"/>
+          <a:blip r:embed="rId3"/>
+          <a:srcRect/>
           <a:stretch/>
         </p:blipFill>
         <p:spPr>
@@ -4040,7 +3644,7 @@
           <a:bodyPr wrap="square" rtlCol="0" anchor="ctr"/>
           <a:lstStyle/>
           <a:p>
-            <a:pPr indent="0" marL="0">
+            <a:pPr marL="0" indent="0">
               <a:buNone/>
             </a:pPr>
             <a:r>
@@ -4079,7 +3683,7 @@
           <a:bodyPr wrap="square" rtlCol="0" anchor="ctr"/>
           <a:lstStyle/>
           <a:p>
-            <a:pPr indent="0" marL="0">
+            <a:pPr marL="0" indent="0">
               <a:spcAft>
                 <a:spcPts val="200"/>
               </a:spcAft>
@@ -4162,7 +3766,7 @@
             <a:endParaRPr lang="en-US" sz="1100" dirty="0"/>
           </a:p>
           <a:p>
-            <a:pPr indent="0" marL="0">
+            <a:pPr marL="0" indent="0">
               <a:spcAft>
                 <a:spcPts val="200"/>
               </a:spcAft>
@@ -4171,7 +3775,7 @@
             <a:endParaRPr lang="en-US" sz="1100" dirty="0"/>
           </a:p>
           <a:p>
-            <a:pPr indent="0" marL="0">
+            <a:pPr marL="0" indent="0">
               <a:spcAft>
                 <a:spcPts val="200"/>
               </a:spcAft>
@@ -4233,7 +3837,7 @@
             <a:endParaRPr lang="en-US" sz="1100" dirty="0"/>
           </a:p>
           <a:p>
-            <a:pPr indent="0" marL="0">
+            <a:pPr marL="0" indent="0">
               <a:spcAft>
                 <a:spcPts val="200"/>
               </a:spcAft>
@@ -4242,7 +3846,7 @@
             <a:endParaRPr lang="en-US" sz="1100" dirty="0"/>
           </a:p>
           <a:p>
-            <a:pPr indent="0" marL="0">
+            <a:pPr marL="0" indent="0">
               <a:spcAft>
                 <a:spcPts val="200"/>
               </a:spcAft>
@@ -4284,7 +3888,7 @@
           <a:bodyPr wrap="square" rtlCol="0" anchor="ctr"/>
           <a:lstStyle/>
           <a:p>
-            <a:pPr indent="0" marL="0">
+            <a:pPr marL="0" indent="0">
               <a:buNone/>
             </a:pPr>
             <a:r>
@@ -4323,7 +3927,7 @@
           <a:bodyPr wrap="square" rtlCol="0" anchor="ctr"/>
           <a:lstStyle/>
           <a:p>
-            <a:pPr algn="r" indent="0" marL="0">
+            <a:pPr marL="0" indent="0" algn="r">
               <a:buNone/>
             </a:pPr>
             <a:r>
@@ -4357,6 +3961,7 @@
         <a:solidFill>
           <a:srgbClr val="FFFFFF"/>
         </a:solidFill>
+        <a:effectLst/>
       </p:bgPr>
     </p:bg>
     <p:spTree>
@@ -4394,7 +3999,7 @@
           <a:bodyPr wrap="square" lIns="0" tIns="0" rIns="0" bIns="0" rtlCol="0" anchor="ctr"/>
           <a:lstStyle/>
           <a:p>
-            <a:pPr indent="0" marL="0">
+            <a:pPr marL="0" indent="0">
               <a:buNone/>
             </a:pPr>
             <a:r>
@@ -4460,7 +4065,7 @@
           <a:bodyPr wrap="square" rtlCol="0" anchor="ctr"/>
           <a:lstStyle/>
           <a:p>
-            <a:pPr indent="0" marL="0">
+            <a:pPr marL="0" indent="0">
               <a:buNone/>
             </a:pPr>
             <a:r>
@@ -4653,7 +4258,7 @@
           <a:bodyPr wrap="square" rtlCol="0" anchor="ctr"/>
           <a:lstStyle/>
           <a:p>
-            <a:pPr indent="0" marL="0">
+            <a:pPr marL="0" indent="0">
               <a:buNone/>
             </a:pPr>
             <a:r>
@@ -4840,7 +4445,7 @@
           <a:bodyPr wrap="square" rtlCol="0" anchor="ctr"/>
           <a:lstStyle/>
           <a:p>
-            <a:pPr indent="0" marL="0">
+            <a:pPr marL="0" indent="0">
               <a:buNone/>
             </a:pPr>
             <a:r>
@@ -4879,7 +4484,7 @@
           <a:bodyPr wrap="square" rtlCol="0" anchor="ctr"/>
           <a:lstStyle/>
           <a:p>
-            <a:pPr algn="r" indent="0" marL="0">
+            <a:pPr marL="0" indent="0" algn="r">
               <a:buNone/>
             </a:pPr>
             <a:r>
@@ -4913,6 +4518,7 @@
         <a:solidFill>
           <a:srgbClr val="FFFFFF"/>
         </a:solidFill>
+        <a:effectLst/>
       </p:bgPr>
     </p:bg>
     <p:spTree>
@@ -5025,7 +4631,7 @@
           <a:bodyPr wrap="square" rtlCol="0" anchor="ctr"/>
           <a:lstStyle/>
           <a:p>
-            <a:pPr algn="ctr" indent="0" marL="0">
+            <a:pPr marL="0" indent="0" algn="ctr">
               <a:buNone/>
             </a:pPr>
             <a:r>
@@ -5064,7 +4670,7 @@
           <a:bodyPr wrap="square" rtlCol="0" anchor="ctr"/>
           <a:lstStyle/>
           <a:p>
-            <a:pPr algn="ctr" indent="0" marL="0">
+            <a:pPr marL="0" indent="0" algn="ctr">
               <a:buNone/>
             </a:pPr>
             <a:r>
@@ -5126,7 +4732,7 @@
           <a:bodyPr wrap="square" rtlCol="0" anchor="ctr"/>
           <a:lstStyle/>
           <a:p>
-            <a:pPr algn="ctr" indent="0" marL="0">
+            <a:pPr marL="0" indent="0" algn="ctr">
               <a:buNone/>
             </a:pPr>
             <a:r>
@@ -5141,45 +4747,6 @@
               <a:t>Ким А.М.  ·  ИУ12-41М  ·  МГТУ им. Н.Э. Баумана</a:t>
             </a:r>
             <a:endParaRPr lang="en-US" sz="1400" dirty="0"/>
-          </a:p>
-        </p:txBody>
-      </p:sp>
-      <p:sp>
-        <p:nvSpPr>
-          <p:cNvPr id="9" name="Text 7"/>
-          <p:cNvSpPr/>
-          <p:nvPr/>
-        </p:nvSpPr>
-        <p:spPr>
-          <a:xfrm>
-            <a:off x="548640" y="4983480"/>
-            <a:ext cx="11064240" cy="365760"/>
-          </a:xfrm>
-          <a:prstGeom prst="rect">
-            <a:avLst/>
-          </a:prstGeom>
-          <a:noFill/>
-          <a:ln/>
-        </p:spPr>
-        <p:txBody>
-          <a:bodyPr wrap="square" rtlCol="0" anchor="ctr"/>
-          <a:lstStyle/>
-          <a:p>
-            <a:pPr algn="ctr" indent="0" marL="0">
-              <a:buNone/>
-            </a:pPr>
-            <a:r>
-              <a:rPr lang="en-US" sz="1200" i="1" dirty="0">
-                <a:solidFill>
-                  <a:srgbClr val="7A7A7A"/>
-                </a:solidFill>
-                <a:latin typeface="Calibri" pitchFamily="34" charset="0"/>
-                <a:ea typeface="Calibri" pitchFamily="34" charset="-122"/>
-                <a:cs typeface="Calibri" pitchFamily="34" charset="-120"/>
-              </a:rPr>
-              <a:t>Код проекта — локальный git-репозиторий (готов к git push)</a:t>
-            </a:r>
-            <a:endParaRPr lang="en-US" sz="1200" dirty="0"/>
           </a:p>
         </p:txBody>
       </p:sp>
@@ -5199,6 +4766,7 @@
         <a:solidFill>
           <a:srgbClr val="FFFFFF"/>
         </a:solidFill>
+        <a:effectLst/>
       </p:bgPr>
     </p:bg>
     <p:spTree>
@@ -5236,7 +4804,7 @@
           <a:bodyPr wrap="square" lIns="0" tIns="0" rIns="0" bIns="0" rtlCol="0" anchor="ctr"/>
           <a:lstStyle/>
           <a:p>
-            <a:pPr indent="0" marL="0">
+            <a:pPr marL="0" indent="0">
               <a:buNone/>
             </a:pPr>
             <a:r>
@@ -5275,7 +4843,7 @@
           <a:bodyPr wrap="square" lIns="0" tIns="0" rIns="0" bIns="0" rtlCol="0" anchor="ctr"/>
           <a:lstStyle/>
           <a:p>
-            <a:pPr indent="0" marL="0">
+            <a:pPr marL="0" indent="0">
               <a:buNone/>
             </a:pPr>
             <a:r>
@@ -5341,7 +4909,7 @@
           <a:bodyPr wrap="square" rtlCol="0" anchor="ctr"/>
           <a:lstStyle/>
           <a:p>
-            <a:pPr indent="0" marL="0">
+            <a:pPr marL="0" indent="0">
               <a:buNone/>
             </a:pPr>
             <a:r>
@@ -5380,7 +4948,7 @@
           <a:bodyPr wrap="square" rtlCol="0" anchor="ctr"/>
           <a:lstStyle/>
           <a:p>
-            <a:pPr indent="0" marL="0">
+            <a:pPr marL="0" indent="0">
               <a:spcAft>
                 <a:spcPts val="400"/>
               </a:spcAft>
@@ -5400,7 +4968,7 @@
             <a:endParaRPr lang="en-US" sz="1300" dirty="0"/>
           </a:p>
           <a:p>
-            <a:pPr indent="0" marL="0">
+            <a:pPr marL="0" indent="0">
               <a:spcAft>
                 <a:spcPts val="400"/>
               </a:spcAft>
@@ -5420,7 +4988,7 @@
             <a:endParaRPr lang="en-US" sz="1300" dirty="0"/>
           </a:p>
           <a:p>
-            <a:pPr indent="0" marL="0">
+            <a:pPr marL="0" indent="0">
               <a:spcAft>
                 <a:spcPts val="400"/>
               </a:spcAft>
@@ -5429,7 +4997,7 @@
             <a:endParaRPr lang="en-US" sz="1300" dirty="0"/>
           </a:p>
           <a:p>
-            <a:pPr indent="0" marL="0">
+            <a:pPr marL="0" indent="0">
               <a:spcAft>
                 <a:spcPts val="400"/>
               </a:spcAft>
@@ -5446,12 +5014,6 @@
               </a:rPr>
               <a:t>Поддомен — </a:t>
             </a:r>
-            <a:pPr indent="0" marL="0">
-              <a:spcAft>
-                <a:spcPts val="400"/>
-              </a:spcAft>
-              <a:buNone/>
-            </a:pPr>
             <a:r>
               <a:rPr lang="en-US" sz="1300" i="1" dirty="0">
                 <a:solidFill>
@@ -5463,12 +5025,6 @@
               </a:rPr>
               <a:t>Environmental Sound Classification</a:t>
             </a:r>
-            <a:pPr indent="0" marL="0">
-              <a:spcAft>
-                <a:spcPts val="400"/>
-              </a:spcAft>
-              <a:buNone/>
-            </a:pPr>
             <a:r>
               <a:rPr lang="en-US" sz="1300" dirty="0">
                 <a:solidFill>
@@ -5617,7 +5173,7 @@
           <a:bodyPr wrap="square" rtlCol="0" anchor="ctr"/>
           <a:lstStyle/>
           <a:p>
-            <a:pPr indent="0" marL="0">
+            <a:pPr marL="0" indent="0">
               <a:buNone/>
             </a:pPr>
             <a:r>
@@ -5656,7 +5212,7 @@
           <a:bodyPr wrap="square" rtlCol="0" anchor="ctr"/>
           <a:lstStyle/>
           <a:p>
-            <a:pPr indent="0" marL="0">
+            <a:pPr marL="0" indent="0">
               <a:spcAft>
                 <a:spcPts val="400"/>
               </a:spcAft>
@@ -5673,59 +5229,87 @@
               </a:rPr>
               <a:t>Классические: </a:t>
             </a:r>
-            <a:pPr indent="0" marL="0">
+            <a:r>
+              <a:rPr lang="en-US" sz="1200" dirty="0">
+                <a:solidFill>
+                  <a:srgbClr val="2A2D34"/>
+                </a:solidFill>
+                <a:latin typeface="Calibri" pitchFamily="34" charset="0"/>
+                <a:ea typeface="Calibri" pitchFamily="34" charset="-122"/>
+                <a:cs typeface="Calibri" pitchFamily="34" charset="-120"/>
+              </a:rPr>
+              <a:t>MFCC + SVM/Random Forest, GMM-HMM. Baseline в литературе ~0.65 на UrbanSound8K.</a:t>
+            </a:r>
+            <a:endParaRPr lang="en-US" sz="1200" dirty="0"/>
+          </a:p>
+          <a:p>
+            <a:pPr marL="0" indent="0">
               <a:spcAft>
                 <a:spcPts val="400"/>
               </a:spcAft>
               <a:buNone/>
             </a:pPr>
-            <a:r>
-              <a:rPr lang="en-US" sz="1200" dirty="0">
-                <a:solidFill>
-                  <a:srgbClr val="2A2D34"/>
-                </a:solidFill>
-                <a:latin typeface="Calibri" pitchFamily="34" charset="0"/>
-                <a:ea typeface="Calibri" pitchFamily="34" charset="-122"/>
-                <a:cs typeface="Calibri" pitchFamily="34" charset="-120"/>
-              </a:rPr>
-              <a:t>MFCC + SVM/Random Forest, GMM-HMM. Baseline в литературе ~0.65 на UrbanSound8K.</a:t>
-            </a:r>
             <a:endParaRPr lang="en-US" sz="1200" dirty="0"/>
           </a:p>
           <a:p>
-            <a:pPr indent="0" marL="0">
+            <a:pPr marL="0" indent="0">
               <a:spcAft>
                 <a:spcPts val="400"/>
               </a:spcAft>
               <a:buNone/>
             </a:pPr>
+            <a:r>
+              <a:rPr lang="en-US" sz="1200" b="1" dirty="0">
+                <a:solidFill>
+                  <a:srgbClr val="2A2D34"/>
+                </a:solidFill>
+                <a:latin typeface="Calibri" pitchFamily="34" charset="0"/>
+                <a:ea typeface="Calibri" pitchFamily="34" charset="-122"/>
+                <a:cs typeface="Calibri" pitchFamily="34" charset="-120"/>
+              </a:rPr>
+              <a:t>Глубокие сети на спектрограммах: </a:t>
+            </a:r>
+            <a:r>
+              <a:rPr lang="en-US" sz="1200" dirty="0">
+                <a:solidFill>
+                  <a:srgbClr val="2A2D34"/>
+                </a:solidFill>
+                <a:latin typeface="Calibri" pitchFamily="34" charset="0"/>
+                <a:ea typeface="Calibri" pitchFamily="34" charset="-122"/>
+                <a:cs typeface="Calibri" pitchFamily="34" charset="-120"/>
+              </a:rPr>
+              <a:t>2D-CNN на лог-мел, PiczakCNN, SB-CNN, AST. Современный стандарт.</a:t>
+            </a:r>
             <a:endParaRPr lang="en-US" sz="1200" dirty="0"/>
           </a:p>
           <a:p>
-            <a:pPr indent="0" marL="0">
+            <a:pPr marL="0" indent="0">
               <a:spcAft>
                 <a:spcPts val="400"/>
               </a:spcAft>
               <a:buNone/>
             </a:pPr>
-            <a:r>
-              <a:rPr lang="en-US" sz="1200" b="1" dirty="0">
-                <a:solidFill>
-                  <a:srgbClr val="2A2D34"/>
-                </a:solidFill>
-                <a:latin typeface="Calibri" pitchFamily="34" charset="0"/>
-                <a:ea typeface="Calibri" pitchFamily="34" charset="-122"/>
-                <a:cs typeface="Calibri" pitchFamily="34" charset="-120"/>
-              </a:rPr>
-              <a:t>Глубокие сети на спектрограммах: </a:t>
-            </a:r>
-            <a:pPr indent="0" marL="0">
+            <a:endParaRPr lang="en-US" sz="1200" dirty="0"/>
+          </a:p>
+          <a:p>
+            <a:pPr marL="0" indent="0">
               <a:spcAft>
                 <a:spcPts val="400"/>
               </a:spcAft>
               <a:buNone/>
             </a:pPr>
             <a:r>
+              <a:rPr lang="en-US" sz="1200" b="1" dirty="0">
+                <a:solidFill>
+                  <a:srgbClr val="2A2D34"/>
+                </a:solidFill>
+                <a:latin typeface="Calibri" pitchFamily="34" charset="0"/>
+                <a:ea typeface="Calibri" pitchFamily="34" charset="-122"/>
+                <a:cs typeface="Calibri" pitchFamily="34" charset="-120"/>
+              </a:rPr>
+              <a:t>Pre-training на AudioSet: </a:t>
+            </a:r>
+            <a:r>
               <a:rPr lang="en-US" sz="1200" dirty="0">
                 <a:solidFill>
                   <a:srgbClr val="2A2D34"/>
@@ -5734,12 +5318,12 @@
                 <a:ea typeface="Calibri" pitchFamily="34" charset="-122"/>
                 <a:cs typeface="Calibri" pitchFamily="34" charset="-120"/>
               </a:rPr>
-              <a:t>2D-CNN на лог-мел, PiczakCNN, SB-CNN, AST. Современный стандарт.</a:t>
+              <a:t>PANNs CNN10/CNN14 (Kong et al., 2020). 2 млн аудио, 527 классов.</a:t>
             </a:r>
             <a:endParaRPr lang="en-US" sz="1200" dirty="0"/>
           </a:p>
           <a:p>
-            <a:pPr indent="0" marL="0">
+            <a:pPr marL="0" indent="0">
               <a:spcAft>
                 <a:spcPts val="400"/>
               </a:spcAft>
@@ -5748,7 +5332,7 @@
             <a:endParaRPr lang="en-US" sz="1200" dirty="0"/>
           </a:p>
           <a:p>
-            <a:pPr indent="0" marL="0">
+            <a:pPr marL="0" indent="0">
               <a:spcAft>
                 <a:spcPts val="400"/>
               </a:spcAft>
@@ -5763,60 +5347,8 @@
                 <a:ea typeface="Calibri" pitchFamily="34" charset="-122"/>
                 <a:cs typeface="Calibri" pitchFamily="34" charset="-120"/>
               </a:rPr>
-              <a:t>Pre-training на AudioSet: </a:t>
-            </a:r>
-            <a:pPr indent="0" marL="0">
-              <a:spcAft>
-                <a:spcPts val="400"/>
-              </a:spcAft>
-              <a:buNone/>
-            </a:pPr>
-            <a:r>
-              <a:rPr lang="en-US" sz="1200" dirty="0">
-                <a:solidFill>
-                  <a:srgbClr val="2A2D34"/>
-                </a:solidFill>
-                <a:latin typeface="Calibri" pitchFamily="34" charset="0"/>
-                <a:ea typeface="Calibri" pitchFamily="34" charset="-122"/>
-                <a:cs typeface="Calibri" pitchFamily="34" charset="-120"/>
-              </a:rPr>
-              <a:t>PANNs CNN10/CNN14 (Kong et al., 2020). 2 млн аудио, 527 классов.</a:t>
-            </a:r>
-            <a:endParaRPr lang="en-US" sz="1200" dirty="0"/>
-          </a:p>
-          <a:p>
-            <a:pPr indent="0" marL="0">
-              <a:spcAft>
-                <a:spcPts val="400"/>
-              </a:spcAft>
-              <a:buNone/>
-            </a:pPr>
-            <a:endParaRPr lang="en-US" sz="1200" dirty="0"/>
-          </a:p>
-          <a:p>
-            <a:pPr indent="0" marL="0">
-              <a:spcAft>
-                <a:spcPts val="400"/>
-              </a:spcAft>
-              <a:buNone/>
-            </a:pPr>
-            <a:r>
-              <a:rPr lang="en-US" sz="1200" b="1" dirty="0">
-                <a:solidFill>
-                  <a:srgbClr val="2A2D34"/>
-                </a:solidFill>
-                <a:latin typeface="Calibri" pitchFamily="34" charset="0"/>
-                <a:ea typeface="Calibri" pitchFamily="34" charset="-122"/>
-                <a:cs typeface="Calibri" pitchFamily="34" charset="-120"/>
-              </a:rPr>
               <a:t>1D-CNN на raw waveform: </a:t>
             </a:r>
-            <a:pPr indent="0" marL="0">
-              <a:spcAft>
-                <a:spcPts val="400"/>
-              </a:spcAft>
-              <a:buNone/>
-            </a:pPr>
             <a:r>
               <a:rPr lang="en-US" sz="1200" dirty="0">
                 <a:solidFill>
@@ -5853,7 +5385,7 @@
           <a:bodyPr wrap="square" rtlCol="0" anchor="ctr"/>
           <a:lstStyle/>
           <a:p>
-            <a:pPr indent="0" marL="0">
+            <a:pPr marL="0" indent="0">
               <a:buNone/>
             </a:pPr>
             <a:r>
@@ -5892,7 +5424,7 @@
           <a:bodyPr wrap="square" rtlCol="0" anchor="ctr"/>
           <a:lstStyle/>
           <a:p>
-            <a:pPr algn="r" indent="0" marL="0">
+            <a:pPr marL="0" indent="0" algn="r">
               <a:buNone/>
             </a:pPr>
             <a:r>
@@ -5926,6 +5458,7 @@
         <a:solidFill>
           <a:srgbClr val="FFFFFF"/>
         </a:solidFill>
+        <a:effectLst/>
       </p:bgPr>
     </p:bg>
     <p:spTree>
@@ -5963,7 +5496,7 @@
           <a:bodyPr wrap="square" lIns="0" tIns="0" rIns="0" bIns="0" rtlCol="0" anchor="ctr"/>
           <a:lstStyle/>
           <a:p>
-            <a:pPr indent="0" marL="0">
+            <a:pPr marL="0" indent="0">
               <a:buNone/>
             </a:pPr>
             <a:r>
@@ -6002,7 +5535,7 @@
           <a:bodyPr wrap="square" lIns="0" tIns="0" rIns="0" bIns="0" rtlCol="0" anchor="ctr"/>
           <a:lstStyle/>
           <a:p>
-            <a:pPr indent="0" marL="0">
+            <a:pPr marL="0" indent="0">
               <a:buNone/>
             </a:pPr>
             <a:r>
@@ -6068,7 +5601,7 @@
           <a:bodyPr wrap="square" rtlCol="0" anchor="ctr"/>
           <a:lstStyle/>
           <a:p>
-            <a:pPr algn="ctr" indent="0" marL="0">
+            <a:pPr marL="0" indent="0" algn="ctr">
               <a:buNone/>
             </a:pPr>
             <a:r>
@@ -6107,7 +5640,7 @@
           <a:bodyPr wrap="square" rtlCol="0" anchor="ctr"/>
           <a:lstStyle/>
           <a:p>
-            <a:pPr algn="ctr" indent="0" marL="0">
+            <a:pPr marL="0" indent="0" algn="ctr">
               <a:buNone/>
             </a:pPr>
             <a:r>
@@ -6173,7 +5706,7 @@
           <a:bodyPr wrap="square" rtlCol="0" anchor="ctr"/>
           <a:lstStyle/>
           <a:p>
-            <a:pPr algn="ctr" indent="0" marL="0">
+            <a:pPr marL="0" indent="0" algn="ctr">
               <a:buNone/>
             </a:pPr>
             <a:r>
@@ -6212,7 +5745,7 @@
           <a:bodyPr wrap="square" rtlCol="0" anchor="ctr"/>
           <a:lstStyle/>
           <a:p>
-            <a:pPr algn="ctr" indent="0" marL="0">
+            <a:pPr marL="0" indent="0" algn="ctr">
               <a:buNone/>
             </a:pPr>
             <a:r>
@@ -6278,7 +5811,7 @@
           <a:bodyPr wrap="square" rtlCol="0" anchor="ctr"/>
           <a:lstStyle/>
           <a:p>
-            <a:pPr algn="ctr" indent="0" marL="0">
+            <a:pPr marL="0" indent="0" algn="ctr">
               <a:buNone/>
             </a:pPr>
             <a:r>
@@ -6317,7 +5850,7 @@
           <a:bodyPr wrap="square" rtlCol="0" anchor="ctr"/>
           <a:lstStyle/>
           <a:p>
-            <a:pPr algn="ctr" indent="0" marL="0">
+            <a:pPr marL="0" indent="0" algn="ctr">
               <a:buNone/>
             </a:pPr>
             <a:r>
@@ -6383,7 +5916,7 @@
           <a:bodyPr wrap="square" rtlCol="0" anchor="ctr"/>
           <a:lstStyle/>
           <a:p>
-            <a:pPr algn="ctr" indent="0" marL="0">
+            <a:pPr marL="0" indent="0" algn="ctr">
               <a:buNone/>
             </a:pPr>
             <a:r>
@@ -6422,7 +5955,7 @@
           <a:bodyPr wrap="square" rtlCol="0" anchor="ctr"/>
           <a:lstStyle/>
           <a:p>
-            <a:pPr algn="ctr" indent="0" marL="0">
+            <a:pPr marL="0" indent="0" algn="ctr">
               <a:buNone/>
             </a:pPr>
             <a:r>
@@ -6488,7 +6021,7 @@
           <a:bodyPr wrap="square" rtlCol="0" anchor="ctr"/>
           <a:lstStyle/>
           <a:p>
-            <a:pPr indent="0" marL="0">
+            <a:pPr marL="0" indent="0">
               <a:buNone/>
             </a:pPr>
             <a:r>
@@ -6554,7 +6087,7 @@
           <a:bodyPr wrap="square" rtlCol="0" anchor="ctr"/>
           <a:lstStyle/>
           <a:p>
-            <a:pPr algn="ctr" indent="0" marL="0">
+            <a:pPr marL="0" indent="0" algn="ctr">
               <a:buNone/>
             </a:pPr>
             <a:r>
@@ -6620,7 +6153,7 @@
           <a:bodyPr wrap="square" rtlCol="0" anchor="ctr"/>
           <a:lstStyle/>
           <a:p>
-            <a:pPr algn="ctr" indent="0" marL="0">
+            <a:pPr marL="0" indent="0" algn="ctr">
               <a:buNone/>
             </a:pPr>
             <a:r>
@@ -6686,7 +6219,7 @@
           <a:bodyPr wrap="square" rtlCol="0" anchor="ctr"/>
           <a:lstStyle/>
           <a:p>
-            <a:pPr algn="ctr" indent="0" marL="0">
+            <a:pPr marL="0" indent="0" algn="ctr">
               <a:buNone/>
             </a:pPr>
             <a:r>
@@ -6752,7 +6285,7 @@
           <a:bodyPr wrap="square" rtlCol="0" anchor="ctr"/>
           <a:lstStyle/>
           <a:p>
-            <a:pPr algn="ctr" indent="0" marL="0">
+            <a:pPr marL="0" indent="0" algn="ctr">
               <a:buNone/>
             </a:pPr>
             <a:r>
@@ -6818,7 +6351,7 @@
           <a:bodyPr wrap="square" rtlCol="0" anchor="ctr"/>
           <a:lstStyle/>
           <a:p>
-            <a:pPr algn="ctr" indent="0" marL="0">
+            <a:pPr marL="0" indent="0" algn="ctr">
               <a:buNone/>
             </a:pPr>
             <a:r>
@@ -6884,7 +6417,7 @@
           <a:bodyPr wrap="square" rtlCol="0" anchor="ctr"/>
           <a:lstStyle/>
           <a:p>
-            <a:pPr algn="ctr" indent="0" marL="0">
+            <a:pPr marL="0" indent="0" algn="ctr">
               <a:buNone/>
             </a:pPr>
             <a:r>
@@ -6950,7 +6483,7 @@
           <a:bodyPr wrap="square" rtlCol="0" anchor="ctr"/>
           <a:lstStyle/>
           <a:p>
-            <a:pPr algn="ctr" indent="0" marL="0">
+            <a:pPr marL="0" indent="0" algn="ctr">
               <a:buNone/>
             </a:pPr>
             <a:r>
@@ -7016,7 +6549,7 @@
           <a:bodyPr wrap="square" rtlCol="0" anchor="ctr"/>
           <a:lstStyle/>
           <a:p>
-            <a:pPr algn="ctr" indent="0" marL="0">
+            <a:pPr marL="0" indent="0" algn="ctr">
               <a:buNone/>
             </a:pPr>
             <a:r>
@@ -7082,7 +6615,7 @@
           <a:bodyPr wrap="square" rtlCol="0" anchor="ctr"/>
           <a:lstStyle/>
           <a:p>
-            <a:pPr algn="ctr" indent="0" marL="0">
+            <a:pPr marL="0" indent="0" algn="ctr">
               <a:buNone/>
             </a:pPr>
             <a:r>
@@ -7148,7 +6681,7 @@
           <a:bodyPr wrap="square" rtlCol="0" anchor="ctr"/>
           <a:lstStyle/>
           <a:p>
-            <a:pPr algn="ctr" indent="0" marL="0">
+            <a:pPr marL="0" indent="0" algn="ctr">
               <a:buNone/>
             </a:pPr>
             <a:r>
@@ -7187,7 +6720,7 @@
           <a:bodyPr wrap="square" rtlCol="0" anchor="ctr"/>
           <a:lstStyle/>
           <a:p>
-            <a:pPr indent="0" marL="0">
+            <a:pPr marL="0" indent="0">
               <a:buNone/>
             </a:pPr>
             <a:r>
@@ -7253,7 +6786,7 @@
           <a:bodyPr wrap="square" rtlCol="0" anchor="ctr"/>
           <a:lstStyle/>
           <a:p>
-            <a:pPr indent="0" marL="0">
+            <a:pPr marL="0" indent="0">
               <a:buNone/>
             </a:pPr>
             <a:r>
@@ -7292,7 +6825,7 @@
           <a:bodyPr wrap="square" rtlCol="0" anchor="ctr"/>
           <a:lstStyle/>
           <a:p>
-            <a:pPr indent="0" marL="0">
+            <a:pPr marL="0" indent="0">
               <a:spcAft>
                 <a:spcPts val="300"/>
               </a:spcAft>
@@ -7312,7 +6845,7 @@
             <a:endParaRPr lang="en-US" sz="1100" dirty="0"/>
           </a:p>
           <a:p>
-            <a:pPr indent="0" marL="0">
+            <a:pPr marL="0" indent="0">
               <a:spcAft>
                 <a:spcPts val="300"/>
               </a:spcAft>
@@ -7332,7 +6865,7 @@
             <a:endParaRPr lang="en-US" sz="1100" dirty="0"/>
           </a:p>
           <a:p>
-            <a:pPr indent="0" marL="0">
+            <a:pPr marL="0" indent="0">
               <a:spcAft>
                 <a:spcPts val="300"/>
               </a:spcAft>
@@ -7341,7 +6874,7 @@
             <a:endParaRPr lang="en-US" sz="1100" dirty="0"/>
           </a:p>
           <a:p>
-            <a:pPr indent="0" marL="0">
+            <a:pPr marL="0" indent="0">
               <a:spcAft>
                 <a:spcPts val="300"/>
               </a:spcAft>
@@ -7361,7 +6894,7 @@
             <a:endParaRPr lang="en-US" sz="1100" dirty="0"/>
           </a:p>
           <a:p>
-            <a:pPr indent="0" marL="0">
+            <a:pPr marL="0" indent="0">
               <a:spcAft>
                 <a:spcPts val="300"/>
               </a:spcAft>
@@ -7381,7 +6914,7 @@
             <a:endParaRPr lang="en-US" sz="1100" dirty="0"/>
           </a:p>
           <a:p>
-            <a:pPr indent="0" marL="0">
+            <a:pPr marL="0" indent="0">
               <a:spcAft>
                 <a:spcPts val="300"/>
               </a:spcAft>
@@ -7390,7 +6923,7 @@
             <a:endParaRPr lang="en-US" sz="1100" dirty="0"/>
           </a:p>
           <a:p>
-            <a:pPr indent="0" marL="0">
+            <a:pPr marL="0" indent="0">
               <a:spcAft>
                 <a:spcPts val="300"/>
               </a:spcAft>
@@ -7410,7 +6943,7 @@
             <a:endParaRPr lang="en-US" sz="1100" dirty="0"/>
           </a:p>
           <a:p>
-            <a:pPr indent="0" marL="0">
+            <a:pPr marL="0" indent="0">
               <a:spcAft>
                 <a:spcPts val="300"/>
               </a:spcAft>
@@ -7452,7 +6985,7 @@
           <a:bodyPr wrap="square" rtlCol="0" anchor="ctr"/>
           <a:lstStyle/>
           <a:p>
-            <a:pPr indent="0" marL="0">
+            <a:pPr marL="0" indent="0">
               <a:buNone/>
             </a:pPr>
             <a:r>
@@ -7491,7 +7024,7 @@
           <a:bodyPr wrap="square" rtlCol="0" anchor="ctr"/>
           <a:lstStyle/>
           <a:p>
-            <a:pPr algn="r" indent="0" marL="0">
+            <a:pPr marL="0" indent="0" algn="r">
               <a:buNone/>
             </a:pPr>
             <a:r>
@@ -7525,6 +7058,7 @@
         <a:solidFill>
           <a:srgbClr val="FFFFFF"/>
         </a:solidFill>
+        <a:effectLst/>
       </p:bgPr>
     </p:bg>
     <p:spTree>
@@ -7562,7 +7096,7 @@
           <a:bodyPr wrap="square" lIns="0" tIns="0" rIns="0" bIns="0" rtlCol="0" anchor="ctr"/>
           <a:lstStyle/>
           <a:p>
-            <a:pPr indent="0" marL="0">
+            <a:pPr marL="0" indent="0">
               <a:buNone/>
             </a:pPr>
             <a:r>
@@ -7601,7 +7135,7 @@
           <a:bodyPr wrap="square" rtlCol="0" anchor="ctr"/>
           <a:lstStyle/>
           <a:p>
-            <a:pPr indent="0" marL="0">
+            <a:pPr marL="0" indent="0">
               <a:buNone/>
             </a:pPr>
             <a:r>
@@ -7621,7 +7155,7 @@
       </p:sp>
       <p:graphicFrame>
         <p:nvGraphicFramePr>
-          <p:cNvPr id="4" name="Chart 0" descr=""/>
+          <p:cNvPr id="4" name="Chart 0"/>
           <p:cNvGraphicFramePr/>
           <p:nvPr/>
         </p:nvGraphicFramePr>
@@ -7629,9 +7163,9 @@
           <a:off x="502920" y="1920240"/>
           <a:ext cx="5852160" cy="3108960"/>
         </p:xfrm>
-        <a:graphic xmlns:a="http://schemas.openxmlformats.org/drawingml/2006/main">
+        <a:graphic>
           <a:graphicData uri="http://schemas.openxmlformats.org/drawingml/2006/chart">
-            <c:chart xmlns:c="http://schemas.openxmlformats.org/drawingml/2006/chart" r:id="rId1"/>
+            <c:chart xmlns:c="http://schemas.openxmlformats.org/drawingml/2006/chart" xmlns:r="http://schemas.openxmlformats.org/officeDocument/2006/relationships" r:id="rId3"/>
           </a:graphicData>
         </a:graphic>
       </p:graphicFrame>
@@ -7656,7 +7190,7 @@
           <a:bodyPr wrap="square" rtlCol="0" anchor="ctr"/>
           <a:lstStyle/>
           <a:p>
-            <a:pPr indent="0" marL="0">
+            <a:pPr marL="0" indent="0">
               <a:buNone/>
             </a:pPr>
             <a:r>
@@ -7722,7 +7256,7 @@
           <a:bodyPr wrap="square" rtlCol="0" anchor="ctr"/>
           <a:lstStyle/>
           <a:p>
-            <a:pPr indent="0" marL="0">
+            <a:pPr marL="0" indent="0">
               <a:spcAft>
                 <a:spcPts val="300"/>
               </a:spcAft>
@@ -7739,24 +7273,74 @@
               </a:rPr>
               <a:t>Дисбаланс: </a:t>
             </a:r>
-            <a:pPr indent="0" marL="0">
+            <a:r>
+              <a:rPr lang="en-US" sz="1100" dirty="0">
+                <a:solidFill>
+                  <a:srgbClr val="2A2D34"/>
+                </a:solidFill>
+                <a:latin typeface="Calibri" pitchFamily="34" charset="0"/>
+                <a:ea typeface="Calibri" pitchFamily="34" charset="-122"/>
+                <a:cs typeface="Calibri" pitchFamily="34" charset="-120"/>
+              </a:rPr>
+              <a:t>8 из 10 классов имеют ~1 000 файлов. Minority — </a:t>
+            </a:r>
+            <a:r>
+              <a:rPr lang="en-US" sz="1100" b="1" dirty="0">
+                <a:solidFill>
+                  <a:srgbClr val="D97757"/>
+                </a:solidFill>
+                <a:latin typeface="Calibri" pitchFamily="34" charset="0"/>
+                <a:ea typeface="Calibri" pitchFamily="34" charset="-122"/>
+                <a:cs typeface="Calibri" pitchFamily="34" charset="-120"/>
+              </a:rPr>
+              <a:t>gun_shot (374)</a:t>
+            </a:r>
+            <a:r>
+              <a:rPr lang="en-US" sz="1100" dirty="0">
+                <a:solidFill>
+                  <a:srgbClr val="2A2D34"/>
+                </a:solidFill>
+                <a:latin typeface="Calibri" pitchFamily="34" charset="0"/>
+                <a:ea typeface="Calibri" pitchFamily="34" charset="-122"/>
+                <a:cs typeface="Calibri" pitchFamily="34" charset="-120"/>
+              </a:rPr>
+              <a:t> и </a:t>
+            </a:r>
+            <a:r>
+              <a:rPr lang="en-US" sz="1100" b="1" dirty="0">
+                <a:solidFill>
+                  <a:srgbClr val="D97757"/>
+                </a:solidFill>
+                <a:latin typeface="Calibri" pitchFamily="34" charset="0"/>
+                <a:ea typeface="Calibri" pitchFamily="34" charset="-122"/>
+                <a:cs typeface="Calibri" pitchFamily="34" charset="-120"/>
+              </a:rPr>
+              <a:t>car_horn (429)</a:t>
+            </a:r>
+            <a:r>
+              <a:rPr lang="en-US" sz="1100" dirty="0">
+                <a:solidFill>
+                  <a:srgbClr val="2A2D34"/>
+                </a:solidFill>
+                <a:latin typeface="Calibri" pitchFamily="34" charset="0"/>
+                <a:ea typeface="Calibri" pitchFamily="34" charset="-122"/>
+                <a:cs typeface="Calibri" pitchFamily="34" charset="-120"/>
+              </a:rPr>
+              <a:t>.</a:t>
+            </a:r>
+            <a:endParaRPr lang="en-US" sz="1100" dirty="0"/>
+          </a:p>
+          <a:p>
+            <a:pPr marL="0" indent="0">
               <a:spcAft>
                 <a:spcPts val="300"/>
               </a:spcAft>
               <a:buNone/>
             </a:pPr>
-            <a:r>
-              <a:rPr lang="en-US" sz="1100" dirty="0">
-                <a:solidFill>
-                  <a:srgbClr val="2A2D34"/>
-                </a:solidFill>
-                <a:latin typeface="Calibri" pitchFamily="34" charset="0"/>
-                <a:ea typeface="Calibri" pitchFamily="34" charset="-122"/>
-                <a:cs typeface="Calibri" pitchFamily="34" charset="-120"/>
-              </a:rPr>
-              <a:t>8 из 10 классов имеют ~1 000 файлов. Minority — </a:t>
-            </a:r>
-            <a:pPr indent="0" marL="0">
+            <a:endParaRPr lang="en-US" sz="1100" dirty="0"/>
+          </a:p>
+          <a:p>
+            <a:pPr marL="0" indent="0">
               <a:spcAft>
                 <a:spcPts val="300"/>
               </a:spcAft>
@@ -7765,32 +7349,38 @@
             <a:r>
               <a:rPr lang="en-US" sz="1100" b="1" dirty="0">
                 <a:solidFill>
-                  <a:srgbClr val="D97757"/>
-                </a:solidFill>
-                <a:latin typeface="Calibri" pitchFamily="34" charset="0"/>
-                <a:ea typeface="Calibri" pitchFamily="34" charset="-122"/>
-                <a:cs typeface="Calibri" pitchFamily="34" charset="-120"/>
-              </a:rPr>
-              <a:t>gun_shot (374)</a:t>
-            </a:r>
-            <a:pPr indent="0" marL="0">
+                  <a:srgbClr val="2A2D34"/>
+                </a:solidFill>
+                <a:latin typeface="Calibri" pitchFamily="34" charset="0"/>
+                <a:ea typeface="Calibri" pitchFamily="34" charset="-122"/>
+                <a:cs typeface="Calibri" pitchFamily="34" charset="-120"/>
+              </a:rPr>
+              <a:t>Folds: </a:t>
+            </a:r>
+            <a:r>
+              <a:rPr lang="en-US" sz="1100" dirty="0">
+                <a:solidFill>
+                  <a:srgbClr val="2A2D34"/>
+                </a:solidFill>
+                <a:latin typeface="Calibri" pitchFamily="34" charset="0"/>
+                <a:ea typeface="Calibri" pitchFamily="34" charset="-122"/>
+                <a:cs typeface="Calibri" pitchFamily="34" charset="-120"/>
+              </a:rPr>
+              <a:t>10 предзаданных. Стратификация не идеальна — gun_shot отсутствует в 2 folds.</a:t>
+            </a:r>
+            <a:endParaRPr lang="en-US" sz="1100" dirty="0"/>
+          </a:p>
+          <a:p>
+            <a:pPr marL="0" indent="0">
               <a:spcAft>
                 <a:spcPts val="300"/>
               </a:spcAft>
               <a:buNone/>
             </a:pPr>
-            <a:r>
-              <a:rPr lang="en-US" sz="1100" dirty="0">
-                <a:solidFill>
-                  <a:srgbClr val="2A2D34"/>
-                </a:solidFill>
-                <a:latin typeface="Calibri" pitchFamily="34" charset="0"/>
-                <a:ea typeface="Calibri" pitchFamily="34" charset="-122"/>
-                <a:cs typeface="Calibri" pitchFamily="34" charset="-120"/>
-              </a:rPr>
-              <a:t> и </a:t>
-            </a:r>
-            <a:pPr indent="0" marL="0">
+            <a:endParaRPr lang="en-US" sz="1100" dirty="0"/>
+          </a:p>
+          <a:p>
+            <a:pPr marL="0" indent="0">
               <a:spcAft>
                 <a:spcPts val="300"/>
               </a:spcAft>
@@ -7799,96 +7389,84 @@
             <a:r>
               <a:rPr lang="en-US" sz="1100" b="1" dirty="0">
                 <a:solidFill>
-                  <a:srgbClr val="D97757"/>
-                </a:solidFill>
-                <a:latin typeface="Calibri" pitchFamily="34" charset="0"/>
-                <a:ea typeface="Calibri" pitchFamily="34" charset="-122"/>
-                <a:cs typeface="Calibri" pitchFamily="34" charset="-120"/>
-              </a:rPr>
-              <a:t>car_horn (429)</a:t>
-            </a:r>
-            <a:pPr indent="0" marL="0">
+                  <a:srgbClr val="2A2D34"/>
+                </a:solidFill>
+                <a:latin typeface="Calibri" pitchFamily="34" charset="0"/>
+                <a:ea typeface="Calibri" pitchFamily="34" charset="-122"/>
+                <a:cs typeface="Calibri" pitchFamily="34" charset="-120"/>
+              </a:rPr>
+              <a:t>Длительность: </a:t>
+            </a:r>
+            <a:r>
+              <a:rPr lang="en-US" sz="1100" dirty="0">
+                <a:solidFill>
+                  <a:srgbClr val="2A2D34"/>
+                </a:solidFill>
+                <a:latin typeface="Calibri" pitchFamily="34" charset="0"/>
+                <a:ea typeface="Calibri" pitchFamily="34" charset="-122"/>
+                <a:cs typeface="Calibri" pitchFamily="34" charset="-120"/>
+              </a:rPr>
+              <a:t>большинство сегментов 3.5–4 с, ~10% короче 2 с → pad нулями справа, длинные — center-crop.</a:t>
+            </a:r>
+            <a:endParaRPr lang="en-US" sz="1100" dirty="0"/>
+          </a:p>
+          <a:p>
+            <a:pPr marL="0" indent="0">
               <a:spcAft>
                 <a:spcPts val="300"/>
               </a:spcAft>
               <a:buNone/>
             </a:pPr>
-            <a:r>
-              <a:rPr lang="en-US" sz="1100" dirty="0">
-                <a:solidFill>
-                  <a:srgbClr val="2A2D34"/>
-                </a:solidFill>
-                <a:latin typeface="Calibri" pitchFamily="34" charset="0"/>
-                <a:ea typeface="Calibri" pitchFamily="34" charset="-122"/>
-                <a:cs typeface="Calibri" pitchFamily="34" charset="-120"/>
-              </a:rPr>
-              <a:t>.</a:t>
-            </a:r>
             <a:endParaRPr lang="en-US" sz="1100" dirty="0"/>
           </a:p>
           <a:p>
-            <a:pPr indent="0" marL="0">
+            <a:pPr marL="0" indent="0">
               <a:spcAft>
                 <a:spcPts val="300"/>
               </a:spcAft>
               <a:buNone/>
             </a:pPr>
+            <a:r>
+              <a:rPr lang="en-US" sz="1100" b="1" dirty="0">
+                <a:solidFill>
+                  <a:srgbClr val="2A2D34"/>
+                </a:solidFill>
+                <a:latin typeface="Calibri" pitchFamily="34" charset="0"/>
+                <a:ea typeface="Calibri" pitchFamily="34" charset="-122"/>
+                <a:cs typeface="Calibri" pitchFamily="34" charset="-120"/>
+              </a:rPr>
+              <a:t>Sample rate: </a:t>
+            </a:r>
+            <a:r>
+              <a:rPr lang="en-US" sz="1100" dirty="0">
+                <a:solidFill>
+                  <a:srgbClr val="2A2D34"/>
+                </a:solidFill>
+                <a:latin typeface="Calibri" pitchFamily="34" charset="0"/>
+                <a:ea typeface="Calibri" pitchFamily="34" charset="-122"/>
+                <a:cs typeface="Calibri" pitchFamily="34" charset="-120"/>
+              </a:rPr>
+              <a:t>разный (8 / 16 / 22.05 / 44.1 / 48 kHz) — обязателен resample.</a:t>
+            </a:r>
             <a:endParaRPr lang="en-US" sz="1100" dirty="0"/>
           </a:p>
           <a:p>
-            <a:pPr indent="0" marL="0">
+            <a:pPr marL="0" indent="0">
               <a:spcAft>
                 <a:spcPts val="300"/>
               </a:spcAft>
               <a:buNone/>
             </a:pPr>
-            <a:r>
-              <a:rPr lang="en-US" sz="1100" b="1" dirty="0">
-                <a:solidFill>
-                  <a:srgbClr val="2A2D34"/>
-                </a:solidFill>
-                <a:latin typeface="Calibri" pitchFamily="34" charset="0"/>
-                <a:ea typeface="Calibri" pitchFamily="34" charset="-122"/>
-                <a:cs typeface="Calibri" pitchFamily="34" charset="-120"/>
-              </a:rPr>
-              <a:t>Folds: </a:t>
-            </a:r>
-            <a:pPr indent="0" marL="0">
+            <a:endParaRPr lang="en-US" sz="1100" dirty="0"/>
+          </a:p>
+          <a:p>
+            <a:pPr marL="0" indent="0">
               <a:spcAft>
                 <a:spcPts val="300"/>
               </a:spcAft>
               <a:buNone/>
             </a:pPr>
             <a:r>
-              <a:rPr lang="en-US" sz="1100" dirty="0">
-                <a:solidFill>
-                  <a:srgbClr val="2A2D34"/>
-                </a:solidFill>
-                <a:latin typeface="Calibri" pitchFamily="34" charset="0"/>
-                <a:ea typeface="Calibri" pitchFamily="34" charset="-122"/>
-                <a:cs typeface="Calibri" pitchFamily="34" charset="-120"/>
-              </a:rPr>
-              <a:t>10 предзаданных. Стратификация не идеальна — gun_shot отсутствует в 2 folds.</a:t>
-            </a:r>
-            <a:endParaRPr lang="en-US" sz="1100" dirty="0"/>
-          </a:p>
-          <a:p>
-            <a:pPr indent="0" marL="0">
-              <a:spcAft>
-                <a:spcPts val="300"/>
-              </a:spcAft>
-              <a:buNone/>
-            </a:pPr>
-            <a:endParaRPr lang="en-US" sz="1100" dirty="0"/>
-          </a:p>
-          <a:p>
-            <a:pPr indent="0" marL="0">
-              <a:spcAft>
-                <a:spcPts val="300"/>
-              </a:spcAft>
-              <a:buNone/>
-            </a:pPr>
-            <a:r>
               <a:rPr lang="en-US" sz="1100" b="1" dirty="0">
                 <a:solidFill>
                   <a:srgbClr val="2A2D34"/>
@@ -7897,106 +7475,8 @@
                 <a:ea typeface="Calibri" pitchFamily="34" charset="-122"/>
                 <a:cs typeface="Calibri" pitchFamily="34" charset="-120"/>
               </a:rPr>
-              <a:t>Длительность: </a:t>
-            </a:r>
-            <a:pPr indent="0" marL="0">
-              <a:spcAft>
-                <a:spcPts val="300"/>
-              </a:spcAft>
-              <a:buNone/>
-            </a:pPr>
-            <a:r>
-              <a:rPr lang="en-US" sz="1100" dirty="0">
-                <a:solidFill>
-                  <a:srgbClr val="2A2D34"/>
-                </a:solidFill>
-                <a:latin typeface="Calibri" pitchFamily="34" charset="0"/>
-                <a:ea typeface="Calibri" pitchFamily="34" charset="-122"/>
-                <a:cs typeface="Calibri" pitchFamily="34" charset="-120"/>
-              </a:rPr>
-              <a:t>большинство сегментов 3.5–4 с, ~10% короче 2 с → pad нулями справа, длинные — center-crop.</a:t>
-            </a:r>
-            <a:endParaRPr lang="en-US" sz="1100" dirty="0"/>
-          </a:p>
-          <a:p>
-            <a:pPr indent="0" marL="0">
-              <a:spcAft>
-                <a:spcPts val="300"/>
-              </a:spcAft>
-              <a:buNone/>
-            </a:pPr>
-            <a:endParaRPr lang="en-US" sz="1100" dirty="0"/>
-          </a:p>
-          <a:p>
-            <a:pPr indent="0" marL="0">
-              <a:spcAft>
-                <a:spcPts val="300"/>
-              </a:spcAft>
-              <a:buNone/>
-            </a:pPr>
-            <a:r>
-              <a:rPr lang="en-US" sz="1100" b="1" dirty="0">
-                <a:solidFill>
-                  <a:srgbClr val="2A2D34"/>
-                </a:solidFill>
-                <a:latin typeface="Calibri" pitchFamily="34" charset="0"/>
-                <a:ea typeface="Calibri" pitchFamily="34" charset="-122"/>
-                <a:cs typeface="Calibri" pitchFamily="34" charset="-120"/>
-              </a:rPr>
-              <a:t>Sample rate: </a:t>
-            </a:r>
-            <a:pPr indent="0" marL="0">
-              <a:spcAft>
-                <a:spcPts val="300"/>
-              </a:spcAft>
-              <a:buNone/>
-            </a:pPr>
-            <a:r>
-              <a:rPr lang="en-US" sz="1100" dirty="0">
-                <a:solidFill>
-                  <a:srgbClr val="2A2D34"/>
-                </a:solidFill>
-                <a:latin typeface="Calibri" pitchFamily="34" charset="0"/>
-                <a:ea typeface="Calibri" pitchFamily="34" charset="-122"/>
-                <a:cs typeface="Calibri" pitchFamily="34" charset="-120"/>
-              </a:rPr>
-              <a:t>разный (8 / 16 / 22.05 / 44.1 / 48 kHz) — обязателен resample.</a:t>
-            </a:r>
-            <a:endParaRPr lang="en-US" sz="1100" dirty="0"/>
-          </a:p>
-          <a:p>
-            <a:pPr indent="0" marL="0">
-              <a:spcAft>
-                <a:spcPts val="300"/>
-              </a:spcAft>
-              <a:buNone/>
-            </a:pPr>
-            <a:endParaRPr lang="en-US" sz="1100" dirty="0"/>
-          </a:p>
-          <a:p>
-            <a:pPr indent="0" marL="0">
-              <a:spcAft>
-                <a:spcPts val="300"/>
-              </a:spcAft>
-              <a:buNone/>
-            </a:pPr>
-            <a:r>
-              <a:rPr lang="en-US" sz="1100" b="1" dirty="0">
-                <a:solidFill>
-                  <a:srgbClr val="2A2D34"/>
-                </a:solidFill>
-                <a:latin typeface="Calibri" pitchFamily="34" charset="0"/>
-                <a:ea typeface="Calibri" pitchFamily="34" charset="-122"/>
-                <a:cs typeface="Calibri" pitchFamily="34" charset="-120"/>
-              </a:rPr>
               <a:t>Метрики: </a:t>
             </a:r>
-            <a:pPr indent="0" marL="0">
-              <a:spcAft>
-                <a:spcPts val="300"/>
-              </a:spcAft>
-              <a:buNone/>
-            </a:pPr>
             <a:r>
               <a:rPr lang="en-US" sz="1100" dirty="0">
                 <a:solidFill>
@@ -8033,7 +7513,7 @@
           <a:bodyPr wrap="square" rtlCol="0" anchor="ctr"/>
           <a:lstStyle/>
           <a:p>
-            <a:pPr indent="0" marL="0">
+            <a:pPr marL="0" indent="0">
               <a:buNone/>
             </a:pPr>
             <a:r>
@@ -8072,7 +7552,7 @@
           <a:bodyPr wrap="square" rtlCol="0" anchor="ctr"/>
           <a:lstStyle/>
           <a:p>
-            <a:pPr algn="r" indent="0" marL="0">
+            <a:pPr marL="0" indent="0" algn="r">
               <a:buNone/>
             </a:pPr>
             <a:r>
@@ -8106,6 +7586,7 @@
         <a:solidFill>
           <a:srgbClr val="FFFFFF"/>
         </a:solidFill>
+        <a:effectLst/>
       </p:bgPr>
     </p:bg>
     <p:spTree>
@@ -8143,7 +7624,7 @@
           <a:bodyPr wrap="square" lIns="0" tIns="0" rIns="0" bIns="0" rtlCol="0" anchor="ctr"/>
           <a:lstStyle/>
           <a:p>
-            <a:pPr indent="0" marL="0">
+            <a:pPr marL="0" indent="0">
               <a:buNone/>
             </a:pPr>
             <a:r>
@@ -8209,7 +7690,7 @@
           <a:bodyPr wrap="square" rtlCol="0" anchor="ctr"/>
           <a:lstStyle/>
           <a:p>
-            <a:pPr algn="ctr" indent="0" marL="0">
+            <a:pPr marL="0" indent="0" algn="ctr">
               <a:buNone/>
             </a:pPr>
             <a:r>
@@ -8248,7 +7729,7 @@
           <a:bodyPr wrap="square" rtlCol="0" anchor="t"/>
           <a:lstStyle/>
           <a:p>
-            <a:pPr algn="ctr" indent="0" marL="0">
+            <a:pPr marL="0" indent="0" algn="ctr">
               <a:buNone/>
             </a:pPr>
             <a:r>
@@ -8265,7 +7746,7 @@
             <a:endParaRPr lang="en-US" sz="1000" dirty="0"/>
           </a:p>
           <a:p>
-            <a:pPr algn="ctr" indent="0" marL="0">
+            <a:pPr marL="0" indent="0" algn="ctr">
               <a:buNone/>
             </a:pPr>
             <a:r>
@@ -8356,7 +7837,7 @@
           <a:bodyPr wrap="square" rtlCol="0" anchor="ctr"/>
           <a:lstStyle/>
           <a:p>
-            <a:pPr algn="ctr" indent="0" marL="0">
+            <a:pPr marL="0" indent="0" algn="ctr">
               <a:buNone/>
             </a:pPr>
             <a:r>
@@ -8395,7 +7876,7 @@
           <a:bodyPr wrap="square" rtlCol="0" anchor="t"/>
           <a:lstStyle/>
           <a:p>
-            <a:pPr algn="ctr" indent="0" marL="0">
+            <a:pPr marL="0" indent="0" algn="ctr">
               <a:buNone/>
             </a:pPr>
             <a:r>
@@ -8412,7 +7893,7 @@
             <a:endParaRPr lang="en-US" sz="1000" dirty="0"/>
           </a:p>
           <a:p>
-            <a:pPr algn="ctr" indent="0" marL="0">
+            <a:pPr marL="0" indent="0" algn="ctr">
               <a:buNone/>
             </a:pPr>
             <a:r>
@@ -8503,7 +7984,7 @@
           <a:bodyPr wrap="square" rtlCol="0" anchor="ctr"/>
           <a:lstStyle/>
           <a:p>
-            <a:pPr algn="ctr" indent="0" marL="0">
+            <a:pPr marL="0" indent="0" algn="ctr">
               <a:buNone/>
             </a:pPr>
             <a:r>
@@ -8542,7 +8023,7 @@
           <a:bodyPr wrap="square" rtlCol="0" anchor="t"/>
           <a:lstStyle/>
           <a:p>
-            <a:pPr algn="ctr" indent="0" marL="0">
+            <a:pPr marL="0" indent="0" algn="ctr">
               <a:buNone/>
             </a:pPr>
             <a:r>
@@ -8559,7 +8040,7 @@
             <a:endParaRPr lang="en-US" sz="1000" dirty="0"/>
           </a:p>
           <a:p>
-            <a:pPr algn="ctr" indent="0" marL="0">
+            <a:pPr marL="0" indent="0" algn="ctr">
               <a:buNone/>
             </a:pPr>
             <a:r>
@@ -8576,7 +8057,7 @@
             <a:endParaRPr lang="en-US" sz="1000" dirty="0"/>
           </a:p>
           <a:p>
-            <a:pPr algn="ctr" indent="0" marL="0">
+            <a:pPr marL="0" indent="0" algn="ctr">
               <a:buNone/>
             </a:pPr>
             <a:r>
@@ -8667,7 +8148,7 @@
           <a:bodyPr wrap="square" rtlCol="0" anchor="ctr"/>
           <a:lstStyle/>
           <a:p>
-            <a:pPr algn="ctr" indent="0" marL="0">
+            <a:pPr marL="0" indent="0" algn="ctr">
               <a:buNone/>
             </a:pPr>
             <a:r>
@@ -8706,7 +8187,7 @@
           <a:bodyPr wrap="square" rtlCol="0" anchor="t"/>
           <a:lstStyle/>
           <a:p>
-            <a:pPr algn="ctr" indent="0" marL="0">
+            <a:pPr marL="0" indent="0" algn="ctr">
               <a:buNone/>
             </a:pPr>
             <a:r>
@@ -8723,7 +8204,7 @@
             <a:endParaRPr lang="en-US" sz="1000" dirty="0"/>
           </a:p>
           <a:p>
-            <a:pPr algn="ctr" indent="0" marL="0">
+            <a:pPr marL="0" indent="0" algn="ctr">
               <a:buNone/>
             </a:pPr>
             <a:r>
@@ -8740,7 +8221,7 @@
             <a:endParaRPr lang="en-US" sz="1000" dirty="0"/>
           </a:p>
           <a:p>
-            <a:pPr algn="ctr" indent="0" marL="0">
+            <a:pPr marL="0" indent="0" algn="ctr">
               <a:buNone/>
             </a:pPr>
             <a:r>
@@ -8831,7 +8312,7 @@
           <a:bodyPr wrap="square" rtlCol="0" anchor="ctr"/>
           <a:lstStyle/>
           <a:p>
-            <a:pPr algn="ctr" indent="0" marL="0">
+            <a:pPr marL="0" indent="0" algn="ctr">
               <a:buNone/>
             </a:pPr>
             <a:r>
@@ -8870,7 +8351,7 @@
           <a:bodyPr wrap="square" rtlCol="0" anchor="t"/>
           <a:lstStyle/>
           <a:p>
-            <a:pPr algn="ctr" indent="0" marL="0">
+            <a:pPr marL="0" indent="0" algn="ctr">
               <a:buNone/>
             </a:pPr>
             <a:r>
@@ -8887,7 +8368,7 @@
             <a:endParaRPr lang="en-US" sz="1000" dirty="0"/>
           </a:p>
           <a:p>
-            <a:pPr algn="ctr" indent="0" marL="0">
+            <a:pPr marL="0" indent="0" algn="ctr">
               <a:buNone/>
             </a:pPr>
             <a:r>
@@ -8953,7 +8434,7 @@
           <a:bodyPr wrap="square" rtlCol="0" anchor="ctr"/>
           <a:lstStyle/>
           <a:p>
-            <a:pPr indent="0" marL="0">
+            <a:pPr marL="0" indent="0">
               <a:buNone/>
             </a:pPr>
             <a:r>
@@ -8967,9 +8448,6 @@
               </a:rPr>
               <a:t>Выход:  </a:t>
             </a:r>
-            <a:pPr indent="0" marL="0">
-              <a:buNone/>
-            </a:pPr>
             <a:r>
               <a:rPr lang="en-US" sz="1400" dirty="0">
                 <a:solidFill>
@@ -9006,7 +8484,7 @@
           <a:bodyPr wrap="square" rtlCol="0" anchor="ctr"/>
           <a:lstStyle/>
           <a:p>
-            <a:pPr indent="0" marL="0">
+            <a:pPr marL="0" indent="0">
               <a:buNone/>
             </a:pPr>
             <a:r>
@@ -9020,9 +8498,6 @@
               </a:rPr>
               <a:t>Кеш спектрограмм на диск.  </a:t>
             </a:r>
-            <a:pPr indent="0" marL="0">
-              <a:buNone/>
-            </a:pPr>
             <a:r>
               <a:rPr lang="en-US" sz="1200" dirty="0">
                 <a:solidFill>
@@ -9059,7 +8534,7 @@
           <a:bodyPr wrap="square" rtlCol="0" anchor="ctr"/>
           <a:lstStyle/>
           <a:p>
-            <a:pPr indent="0" marL="0">
+            <a:pPr marL="0" indent="0">
               <a:buNone/>
             </a:pPr>
             <a:r>
@@ -9098,7 +8573,7 @@
           <a:bodyPr wrap="square" rtlCol="0" anchor="ctr"/>
           <a:lstStyle/>
           <a:p>
-            <a:pPr indent="0" marL="0">
+            <a:pPr marL="0" indent="0">
               <a:buNone/>
             </a:pPr>
             <a:r>
@@ -9137,7 +8612,7 @@
           <a:bodyPr wrap="square" rtlCol="0" anchor="ctr"/>
           <a:lstStyle/>
           <a:p>
-            <a:pPr algn="r" indent="0" marL="0">
+            <a:pPr marL="0" indent="0" algn="r">
               <a:buNone/>
             </a:pPr>
             <a:r>
@@ -9171,6 +8646,7 @@
         <a:solidFill>
           <a:srgbClr val="FFFFFF"/>
         </a:solidFill>
+        <a:effectLst/>
       </p:bgPr>
     </p:bg>
     <p:spTree>
@@ -9208,7 +8684,7 @@
           <a:bodyPr wrap="square" lIns="0" tIns="0" rIns="0" bIns="0" rtlCol="0" anchor="ctr"/>
           <a:lstStyle/>
           <a:p>
-            <a:pPr indent="0" marL="0">
+            <a:pPr marL="0" indent="0">
               <a:buNone/>
             </a:pPr>
             <a:r>
@@ -9247,7 +8723,7 @@
           <a:bodyPr wrap="square" lIns="0" tIns="0" rIns="0" bIns="0" rtlCol="0" anchor="ctr"/>
           <a:lstStyle/>
           <a:p>
-            <a:pPr indent="0" marL="0">
+            <a:pPr marL="0" indent="0">
               <a:buNone/>
             </a:pPr>
             <a:r>
@@ -9313,7 +8789,7 @@
           <a:bodyPr wrap="square" rtlCol="0" anchor="ctr"/>
           <a:lstStyle/>
           <a:p>
-            <a:pPr indent="0" marL="0">
+            <a:pPr marL="0" indent="0">
               <a:buNone/>
             </a:pPr>
             <a:r>
@@ -9352,7 +8828,7 @@
           <a:bodyPr wrap="square" rtlCol="0" anchor="ctr"/>
           <a:lstStyle/>
           <a:p>
-            <a:pPr algn="r" indent="0" marL="0">
+            <a:pPr marL="0" indent="0" algn="r">
               <a:buNone/>
             </a:pPr>
             <a:r>
@@ -9418,7 +8894,7 @@
           <a:bodyPr wrap="square" rtlCol="0" anchor="ctr"/>
           <a:lstStyle/>
           <a:p>
-            <a:pPr indent="0" marL="0">
+            <a:pPr marL="0" indent="0">
               <a:buNone/>
             </a:pPr>
             <a:r>
@@ -9457,7 +8933,7 @@
           <a:bodyPr wrap="square" rtlCol="0" anchor="ctr"/>
           <a:lstStyle/>
           <a:p>
-            <a:pPr algn="r" indent="0" marL="0">
+            <a:pPr marL="0" indent="0" algn="r">
               <a:buNone/>
             </a:pPr>
             <a:r>
@@ -9523,7 +8999,7 @@
           <a:bodyPr wrap="square" rtlCol="0" anchor="ctr"/>
           <a:lstStyle/>
           <a:p>
-            <a:pPr indent="0" marL="0">
+            <a:pPr marL="0" indent="0">
               <a:buNone/>
             </a:pPr>
             <a:r>
@@ -9562,7 +9038,7 @@
           <a:bodyPr wrap="square" rtlCol="0" anchor="ctr"/>
           <a:lstStyle/>
           <a:p>
-            <a:pPr algn="r" indent="0" marL="0">
+            <a:pPr marL="0" indent="0" algn="r">
               <a:buNone/>
             </a:pPr>
             <a:r>
@@ -9628,7 +9104,7 @@
           <a:bodyPr wrap="square" rtlCol="0" anchor="ctr"/>
           <a:lstStyle/>
           <a:p>
-            <a:pPr indent="0" marL="0">
+            <a:pPr marL="0" indent="0">
               <a:buNone/>
             </a:pPr>
             <a:r>
@@ -9667,7 +9143,7 @@
           <a:bodyPr wrap="square" rtlCol="0" anchor="ctr"/>
           <a:lstStyle/>
           <a:p>
-            <a:pPr algn="r" indent="0" marL="0">
+            <a:pPr marL="0" indent="0" algn="r">
               <a:buNone/>
             </a:pPr>
             <a:r>
@@ -9733,7 +9209,7 @@
           <a:bodyPr wrap="square" rtlCol="0" anchor="ctr"/>
           <a:lstStyle/>
           <a:p>
-            <a:pPr indent="0" marL="0">
+            <a:pPr marL="0" indent="0">
               <a:buNone/>
             </a:pPr>
             <a:r>
@@ -9772,7 +9248,7 @@
           <a:bodyPr wrap="square" rtlCol="0" anchor="ctr"/>
           <a:lstStyle/>
           <a:p>
-            <a:pPr algn="r" indent="0" marL="0">
+            <a:pPr marL="0" indent="0" algn="r">
               <a:buNone/>
             </a:pPr>
             <a:r>
@@ -9838,7 +9314,7 @@
           <a:bodyPr wrap="square" rtlCol="0" anchor="ctr"/>
           <a:lstStyle/>
           <a:p>
-            <a:pPr indent="0" marL="0">
+            <a:pPr marL="0" indent="0">
               <a:buNone/>
             </a:pPr>
             <a:r>
@@ -9877,7 +9353,7 @@
           <a:bodyPr wrap="square" rtlCol="0" anchor="ctr"/>
           <a:lstStyle/>
           <a:p>
-            <a:pPr algn="r" indent="0" marL="0">
+            <a:pPr marL="0" indent="0" algn="r">
               <a:buNone/>
             </a:pPr>
             <a:r>
@@ -9943,7 +9419,7 @@
           <a:bodyPr wrap="square" rtlCol="0" anchor="ctr"/>
           <a:lstStyle/>
           <a:p>
-            <a:pPr indent="0" marL="0">
+            <a:pPr marL="0" indent="0">
               <a:buNone/>
             </a:pPr>
             <a:r>
@@ -9982,7 +9458,7 @@
           <a:bodyPr wrap="square" rtlCol="0" anchor="ctr"/>
           <a:lstStyle/>
           <a:p>
-            <a:pPr algn="r" indent="0" marL="0">
+            <a:pPr marL="0" indent="0" algn="r">
               <a:buNone/>
             </a:pPr>
             <a:r>
@@ -10048,7 +9524,7 @@
           <a:bodyPr wrap="square" rtlCol="0" anchor="ctr"/>
           <a:lstStyle/>
           <a:p>
-            <a:pPr indent="0" marL="0">
+            <a:pPr marL="0" indent="0">
               <a:buNone/>
             </a:pPr>
             <a:r>
@@ -10087,7 +9563,7 @@
           <a:bodyPr wrap="square" rtlCol="0" anchor="ctr"/>
           <a:lstStyle/>
           <a:p>
-            <a:pPr indent="0" marL="0">
+            <a:pPr marL="0" indent="0">
               <a:buNone/>
             </a:pPr>
             <a:r>
@@ -10101,9 +9577,6 @@
               </a:rPr>
               <a:t>Conv2d(k = 3, p = 1) → </a:t>
             </a:r>
-            <a:pPr indent="0" marL="0">
-              <a:buNone/>
-            </a:pPr>
             <a:r>
               <a:rPr lang="en-US" sz="1200" b="1" dirty="0">
                 <a:solidFill>
@@ -10115,9 +9588,6 @@
               </a:rPr>
               <a:t>BatchNorm2d</a:t>
             </a:r>
-            <a:pPr indent="0" marL="0">
-              <a:buNone/>
-            </a:pPr>
             <a:r>
               <a:rPr lang="en-US" sz="1200" dirty="0">
                 <a:solidFill>
@@ -10129,9 +9599,6 @@
               </a:rPr>
               <a:t> → ReLU → </a:t>
             </a:r>
-            <a:pPr indent="0" marL="0">
-              <a:buNone/>
-            </a:pPr>
             <a:r>
               <a:rPr lang="en-US" sz="1200" b="1" dirty="0">
                 <a:solidFill>
@@ -10143,9 +9610,6 @@
               </a:rPr>
               <a:t>MaxPool(2,2)</a:t>
             </a:r>
-            <a:pPr indent="0" marL="0">
-              <a:buNone/>
-            </a:pPr>
             <a:r>
               <a:rPr lang="en-US" sz="1200" dirty="0">
                 <a:solidFill>
@@ -10157,9 +9621,6 @@
               </a:rPr>
               <a:t> → </a:t>
             </a:r>
-            <a:pPr indent="0" marL="0">
-              <a:buNone/>
-            </a:pPr>
             <a:r>
               <a:rPr lang="en-US" sz="1200" b="1" dirty="0">
                 <a:solidFill>
@@ -10171,9 +9632,6 @@
               </a:rPr>
               <a:t>Dropout2d</a:t>
             </a:r>
-            <a:pPr indent="0" marL="0">
-              <a:buNone/>
-            </a:pPr>
             <a:r>
               <a:rPr lang="en-US" sz="1200" dirty="0">
                 <a:solidFill>
@@ -10188,13 +9646,13 @@
             <a:endParaRPr lang="en-US" sz="1200" dirty="0"/>
           </a:p>
           <a:p>
-            <a:pPr indent="0" marL="0">
+            <a:pPr marL="0" indent="0">
               <a:buNone/>
             </a:pPr>
             <a:endParaRPr lang="en-US" sz="1200" dirty="0"/>
           </a:p>
           <a:p>
-            <a:pPr indent="0" marL="0">
+            <a:pPr marL="0" indent="0">
               <a:buNone/>
             </a:pPr>
             <a:r>
@@ -10260,7 +9718,7 @@
           <a:bodyPr wrap="square" rtlCol="0" anchor="ctr"/>
           <a:lstStyle/>
           <a:p>
-            <a:pPr indent="0" marL="0">
+            <a:pPr marL="0" indent="0">
               <a:buNone/>
             </a:pPr>
             <a:r>
@@ -10299,7 +9757,7 @@
           <a:bodyPr wrap="square" rtlCol="0" anchor="ctr"/>
           <a:lstStyle/>
           <a:p>
-            <a:pPr indent="0" marL="0">
+            <a:pPr marL="0" indent="0">
               <a:spcAft>
                 <a:spcPts val="200"/>
               </a:spcAft>
@@ -10316,13 +9774,38 @@
               </a:rPr>
               <a:t>Optimizer:</a:t>
             </a:r>
-            <a:pPr indent="0" marL="0">
+            <a:r>
+              <a:rPr lang="en-US" sz="1100" dirty="0">
+                <a:solidFill>
+                  <a:srgbClr val="2A2D34"/>
+                </a:solidFill>
+                <a:latin typeface="Calibri" pitchFamily="34" charset="0"/>
+                <a:ea typeface="Calibri" pitchFamily="34" charset="-122"/>
+                <a:cs typeface="Calibri" pitchFamily="34" charset="-120"/>
+              </a:rPr>
+              <a:t> AdamW, lr = 1e-3, weight_decay = 1e-4</a:t>
+            </a:r>
+            <a:endParaRPr lang="en-US" sz="1100" dirty="0"/>
+          </a:p>
+          <a:p>
+            <a:pPr marL="0" indent="0">
               <a:spcAft>
                 <a:spcPts val="200"/>
               </a:spcAft>
               <a:buNone/>
             </a:pPr>
             <a:r>
+              <a:rPr lang="en-US" sz="1100" b="1" dirty="0">
+                <a:solidFill>
+                  <a:srgbClr val="2A2D34"/>
+                </a:solidFill>
+                <a:latin typeface="Calibri" pitchFamily="34" charset="0"/>
+                <a:ea typeface="Calibri" pitchFamily="34" charset="-122"/>
+                <a:cs typeface="Calibri" pitchFamily="34" charset="-120"/>
+              </a:rPr>
+              <a:t>Loss:</a:t>
+            </a:r>
+            <a:r>
               <a:rPr lang="en-US" sz="1100" dirty="0">
                 <a:solidFill>
                   <a:srgbClr val="2A2D34"/>
@@ -10331,12 +9814,12 @@
                 <a:ea typeface="Calibri" pitchFamily="34" charset="-122"/>
                 <a:cs typeface="Calibri" pitchFamily="34" charset="-120"/>
               </a:rPr>
-              <a:t> AdamW, lr = 1e-3, weight_decay = 1e-4</a:t>
+              <a:t> CrossEntropy</a:t>
             </a:r>
             <a:endParaRPr lang="en-US" sz="1100" dirty="0"/>
           </a:p>
           <a:p>
-            <a:pPr indent="0" marL="0">
+            <a:pPr marL="0" indent="0">
               <a:spcAft>
                 <a:spcPts val="200"/>
               </a:spcAft>
@@ -10351,15 +9834,40 @@
                 <a:ea typeface="Calibri" pitchFamily="34" charset="-122"/>
                 <a:cs typeface="Calibri" pitchFamily="34" charset="-120"/>
               </a:rPr>
-              <a:t>Loss:</a:t>
-            </a:r>
-            <a:pPr indent="0" marL="0">
+              <a:t>Scheduler:</a:t>
+            </a:r>
+            <a:r>
+              <a:rPr lang="en-US" sz="1100" dirty="0">
+                <a:solidFill>
+                  <a:srgbClr val="2A2D34"/>
+                </a:solidFill>
+                <a:latin typeface="Calibri" pitchFamily="34" charset="0"/>
+                <a:ea typeface="Calibri" pitchFamily="34" charset="-122"/>
+                <a:cs typeface="Calibri" pitchFamily="34" charset="-120"/>
+              </a:rPr>
+              <a:t> CosineAnnealingLR(T_max = epochs)</a:t>
+            </a:r>
+            <a:endParaRPr lang="en-US" sz="1100" dirty="0"/>
+          </a:p>
+          <a:p>
+            <a:pPr marL="0" indent="0">
               <a:spcAft>
                 <a:spcPts val="200"/>
               </a:spcAft>
               <a:buNone/>
             </a:pPr>
             <a:r>
+              <a:rPr lang="en-US" sz="1100" b="1" dirty="0">
+                <a:solidFill>
+                  <a:srgbClr val="2A2D34"/>
+                </a:solidFill>
+                <a:latin typeface="Calibri" pitchFamily="34" charset="0"/>
+                <a:ea typeface="Calibri" pitchFamily="34" charset="-122"/>
+                <a:cs typeface="Calibri" pitchFamily="34" charset="-120"/>
+              </a:rPr>
+              <a:t>Early stop:</a:t>
+            </a:r>
+            <a:r>
               <a:rPr lang="en-US" sz="1100" dirty="0">
                 <a:solidFill>
                   <a:srgbClr val="2A2D34"/>
@@ -10368,12 +9876,12 @@
                 <a:ea typeface="Calibri" pitchFamily="34" charset="-122"/>
                 <a:cs typeface="Calibri" pitchFamily="34" charset="-120"/>
               </a:rPr>
-              <a:t> CrossEntropy</a:t>
+              <a:t> patience по val_acc</a:t>
             </a:r>
             <a:endParaRPr lang="en-US" sz="1100" dirty="0"/>
           </a:p>
           <a:p>
-            <a:pPr indent="0" marL="0">
+            <a:pPr marL="0" indent="0">
               <a:spcAft>
                 <a:spcPts val="200"/>
               </a:spcAft>
@@ -10388,35 +9896,29 @@
                 <a:ea typeface="Calibri" pitchFamily="34" charset="-122"/>
                 <a:cs typeface="Calibri" pitchFamily="34" charset="-120"/>
               </a:rPr>
-              <a:t>Scheduler:</a:t>
-            </a:r>
-            <a:pPr indent="0" marL="0">
+              <a:t>Grad clip:</a:t>
+            </a:r>
+            <a:r>
+              <a:rPr lang="en-US" sz="1100" dirty="0">
+                <a:solidFill>
+                  <a:srgbClr val="2A2D34"/>
+                </a:solidFill>
+                <a:latin typeface="Calibri" pitchFamily="34" charset="0"/>
+                <a:ea typeface="Calibri" pitchFamily="34" charset="-122"/>
+                <a:cs typeface="Calibri" pitchFamily="34" charset="-120"/>
+              </a:rPr>
+              <a:t> max_norm = 1.0</a:t>
+            </a:r>
+            <a:endParaRPr lang="en-US" sz="1100" dirty="0"/>
+          </a:p>
+          <a:p>
+            <a:pPr marL="0" indent="0">
               <a:spcAft>
                 <a:spcPts val="200"/>
               </a:spcAft>
               <a:buNone/>
             </a:pPr>
             <a:r>
-              <a:rPr lang="en-US" sz="1100" dirty="0">
-                <a:solidFill>
-                  <a:srgbClr val="2A2D34"/>
-                </a:solidFill>
-                <a:latin typeface="Calibri" pitchFamily="34" charset="0"/>
-                <a:ea typeface="Calibri" pitchFamily="34" charset="-122"/>
-                <a:cs typeface="Calibri" pitchFamily="34" charset="-120"/>
-              </a:rPr>
-              <a:t> CosineAnnealingLR(T_max = epochs)</a:t>
-            </a:r>
-            <a:endParaRPr lang="en-US" sz="1100" dirty="0"/>
-          </a:p>
-          <a:p>
-            <a:pPr indent="0" marL="0">
-              <a:spcAft>
-                <a:spcPts val="200"/>
-              </a:spcAft>
-              <a:buNone/>
-            </a:pPr>
-            <a:r>
               <a:rPr lang="en-US" sz="1100" b="1" dirty="0">
                 <a:solidFill>
                   <a:srgbClr val="2A2D34"/>
@@ -10425,88 +9927,8 @@
                 <a:ea typeface="Calibri" pitchFamily="34" charset="-122"/>
                 <a:cs typeface="Calibri" pitchFamily="34" charset="-120"/>
               </a:rPr>
-              <a:t>Early stop:</a:t>
-            </a:r>
-            <a:pPr indent="0" marL="0">
-              <a:spcAft>
-                <a:spcPts val="200"/>
-              </a:spcAft>
-              <a:buNone/>
-            </a:pPr>
-            <a:r>
-              <a:rPr lang="en-US" sz="1100" dirty="0">
-                <a:solidFill>
-                  <a:srgbClr val="2A2D34"/>
-                </a:solidFill>
-                <a:latin typeface="Calibri" pitchFamily="34" charset="0"/>
-                <a:ea typeface="Calibri" pitchFamily="34" charset="-122"/>
-                <a:cs typeface="Calibri" pitchFamily="34" charset="-120"/>
-              </a:rPr>
-              <a:t> patience по val_acc</a:t>
-            </a:r>
-            <a:endParaRPr lang="en-US" sz="1100" dirty="0"/>
-          </a:p>
-          <a:p>
-            <a:pPr indent="0" marL="0">
-              <a:spcAft>
-                <a:spcPts val="200"/>
-              </a:spcAft>
-              <a:buNone/>
-            </a:pPr>
-            <a:r>
-              <a:rPr lang="en-US" sz="1100" b="1" dirty="0">
-                <a:solidFill>
-                  <a:srgbClr val="2A2D34"/>
-                </a:solidFill>
-                <a:latin typeface="Calibri" pitchFamily="34" charset="0"/>
-                <a:ea typeface="Calibri" pitchFamily="34" charset="-122"/>
-                <a:cs typeface="Calibri" pitchFamily="34" charset="-120"/>
-              </a:rPr>
-              <a:t>Grad clip:</a:t>
-            </a:r>
-            <a:pPr indent="0" marL="0">
-              <a:spcAft>
-                <a:spcPts val="200"/>
-              </a:spcAft>
-              <a:buNone/>
-            </a:pPr>
-            <a:r>
-              <a:rPr lang="en-US" sz="1100" dirty="0">
-                <a:solidFill>
-                  <a:srgbClr val="2A2D34"/>
-                </a:solidFill>
-                <a:latin typeface="Calibri" pitchFamily="34" charset="0"/>
-                <a:ea typeface="Calibri" pitchFamily="34" charset="-122"/>
-                <a:cs typeface="Calibri" pitchFamily="34" charset="-120"/>
-              </a:rPr>
-              <a:t> max_norm = 1.0</a:t>
-            </a:r>
-            <a:endParaRPr lang="en-US" sz="1100" dirty="0"/>
-          </a:p>
-          <a:p>
-            <a:pPr indent="0" marL="0">
-              <a:spcAft>
-                <a:spcPts val="200"/>
-              </a:spcAft>
-              <a:buNone/>
-            </a:pPr>
-            <a:r>
-              <a:rPr lang="en-US" sz="1100" b="1" dirty="0">
-                <a:solidFill>
-                  <a:srgbClr val="2A2D34"/>
-                </a:solidFill>
-                <a:latin typeface="Calibri" pitchFamily="34" charset="0"/>
-                <a:ea typeface="Calibri" pitchFamily="34" charset="-122"/>
-                <a:cs typeface="Calibri" pitchFamily="34" charset="-120"/>
-              </a:rPr>
               <a:t>Batch:</a:t>
             </a:r>
-            <a:pPr indent="0" marL="0">
-              <a:spcAft>
-                <a:spcPts val="200"/>
-              </a:spcAft>
-              <a:buNone/>
-            </a:pPr>
             <a:r>
               <a:rPr lang="en-US" sz="1100" dirty="0">
                 <a:solidFill>
@@ -10543,7 +9965,7 @@
           <a:bodyPr wrap="square" rtlCol="0" anchor="ctr"/>
           <a:lstStyle/>
           <a:p>
-            <a:pPr indent="0" marL="0">
+            <a:pPr marL="0" indent="0">
               <a:buNone/>
             </a:pPr>
             <a:r>
@@ -10582,7 +10004,7 @@
           <a:bodyPr wrap="square" rtlCol="0" anchor="ctr"/>
           <a:lstStyle/>
           <a:p>
-            <a:pPr algn="r" indent="0" marL="0">
+            <a:pPr marL="0" indent="0" algn="r">
               <a:buNone/>
             </a:pPr>
             <a:r>
@@ -10616,6 +10038,7 @@
         <a:solidFill>
           <a:srgbClr val="FFFFFF"/>
         </a:solidFill>
+        <a:effectLst/>
       </p:bgPr>
     </p:bg>
     <p:spTree>
@@ -10653,7 +10076,7 @@
           <a:bodyPr wrap="square" lIns="0" tIns="0" rIns="0" bIns="0" rtlCol="0" anchor="ctr"/>
           <a:lstStyle/>
           <a:p>
-            <a:pPr indent="0" marL="0">
+            <a:pPr marL="0" indent="0">
               <a:buNone/>
             </a:pPr>
             <a:r>
@@ -10692,7 +10115,7 @@
           <a:bodyPr wrap="square" lIns="0" tIns="0" rIns="0" bIns="0" rtlCol="0" anchor="ctr"/>
           <a:lstStyle/>
           <a:p>
-            <a:pPr indent="0" marL="0">
+            <a:pPr marL="0" indent="0">
               <a:buNone/>
             </a:pPr>
             <a:r>
@@ -10758,7 +10181,7 @@
           <a:bodyPr wrap="square" rtlCol="0" anchor="ctr"/>
           <a:lstStyle/>
           <a:p>
-            <a:pPr algn="ctr" indent="0" marL="0">
+            <a:pPr marL="0" indent="0" algn="ctr">
               <a:buNone/>
             </a:pPr>
             <a:r>
@@ -10775,7 +10198,7 @@
             <a:endParaRPr lang="en-US" sz="1100" dirty="0"/>
           </a:p>
           <a:p>
-            <a:pPr algn="ctr" indent="0" marL="0">
+            <a:pPr marL="0" indent="0" algn="ctr">
               <a:buNone/>
             </a:pPr>
             <a:r>
@@ -10841,7 +10264,7 @@
           <a:bodyPr wrap="square" rtlCol="0" anchor="ctr"/>
           <a:lstStyle/>
           <a:p>
-            <a:pPr algn="ctr" indent="0" marL="0">
+            <a:pPr marL="0" indent="0" algn="ctr">
               <a:buNone/>
             </a:pPr>
             <a:r>
@@ -10858,7 +10281,7 @@
             <a:endParaRPr lang="en-US" sz="1100" dirty="0"/>
           </a:p>
           <a:p>
-            <a:pPr algn="ctr" indent="0" marL="0">
+            <a:pPr marL="0" indent="0" algn="ctr">
               <a:buNone/>
             </a:pPr>
             <a:r>
@@ -10924,7 +10347,7 @@
           <a:bodyPr wrap="square" rtlCol="0" anchor="ctr"/>
           <a:lstStyle/>
           <a:p>
-            <a:pPr algn="ctr" indent="0" marL="0">
+            <a:pPr marL="0" indent="0" algn="ctr">
               <a:buNone/>
             </a:pPr>
             <a:r>
@@ -10941,7 +10364,7 @@
             <a:endParaRPr lang="en-US" sz="1100" dirty="0"/>
           </a:p>
           <a:p>
-            <a:pPr algn="ctr" indent="0" marL="0">
+            <a:pPr marL="0" indent="0" algn="ctr">
               <a:buNone/>
             </a:pPr>
             <a:r>
@@ -11007,7 +10430,7 @@
           <a:bodyPr wrap="square" rtlCol="0" anchor="ctr"/>
           <a:lstStyle/>
           <a:p>
-            <a:pPr algn="ctr" indent="0" marL="0">
+            <a:pPr marL="0" indent="0" algn="ctr">
               <a:buNone/>
             </a:pPr>
             <a:r>
@@ -11024,7 +10447,7 @@
             <a:endParaRPr lang="en-US" sz="1100" dirty="0"/>
           </a:p>
           <a:p>
-            <a:pPr algn="ctr" indent="0" marL="0">
+            <a:pPr marL="0" indent="0" algn="ctr">
               <a:buNone/>
             </a:pPr>
             <a:r>
@@ -11090,7 +10513,7 @@
           <a:bodyPr wrap="square" rtlCol="0" anchor="ctr"/>
           <a:lstStyle/>
           <a:p>
-            <a:pPr algn="ctr" indent="0" marL="0">
+            <a:pPr marL="0" indent="0" algn="ctr">
               <a:buNone/>
             </a:pPr>
             <a:r>
@@ -11107,7 +10530,7 @@
             <a:endParaRPr lang="en-US" sz="1100" dirty="0"/>
           </a:p>
           <a:p>
-            <a:pPr algn="ctr" indent="0" marL="0">
+            <a:pPr marL="0" indent="0" algn="ctr">
               <a:buNone/>
             </a:pPr>
             <a:r>
@@ -11173,7 +10596,7 @@
           <a:bodyPr wrap="square" rtlCol="0" anchor="ctr"/>
           <a:lstStyle/>
           <a:p>
-            <a:pPr algn="ctr" indent="0" marL="0">
+            <a:pPr marL="0" indent="0" algn="ctr">
               <a:buNone/>
             </a:pPr>
             <a:r>
@@ -11190,7 +10613,7 @@
             <a:endParaRPr lang="en-US" sz="1100" dirty="0"/>
           </a:p>
           <a:p>
-            <a:pPr algn="ctr" indent="0" marL="0">
+            <a:pPr marL="0" indent="0" algn="ctr">
               <a:buNone/>
             </a:pPr>
             <a:r>
@@ -11229,7 +10652,7 @@
           <a:bodyPr wrap="square" rtlCol="0" anchor="ctr"/>
           <a:lstStyle/>
           <a:p>
-            <a:pPr algn="ctr" indent="0" marL="0">
+            <a:pPr marL="0" indent="0" algn="ctr">
               <a:buNone/>
             </a:pPr>
             <a:r>
@@ -11268,7 +10691,7 @@
           <a:bodyPr wrap="square" rtlCol="0" anchor="ctr"/>
           <a:lstStyle/>
           <a:p>
-            <a:pPr algn="l" indent="0" marL="0">
+            <a:pPr marL="0" indent="0" algn="l">
               <a:buNone/>
             </a:pPr>
             <a:r>
@@ -11307,7 +10730,7 @@
           <a:bodyPr wrap="square" rtlCol="0" anchor="ctr"/>
           <a:lstStyle/>
           <a:p>
-            <a:pPr algn="ctr" indent="0" marL="0">
+            <a:pPr marL="0" indent="0" algn="ctr">
               <a:buNone/>
             </a:pPr>
             <a:r>
@@ -11373,7 +10796,7 @@
           <a:bodyPr wrap="square" rtlCol="0" anchor="ctr"/>
           <a:lstStyle/>
           <a:p>
-            <a:pPr indent="0" marL="0">
+            <a:pPr marL="0" indent="0">
               <a:buNone/>
             </a:pPr>
             <a:r>
@@ -11464,7 +10887,7 @@
           <a:bodyPr wrap="square" rtlCol="0" anchor="ctr"/>
           <a:lstStyle/>
           <a:p>
-            <a:pPr indent="0" marL="0">
+            <a:pPr marL="0" indent="0">
               <a:buNone/>
             </a:pPr>
             <a:r>
@@ -11503,7 +10926,7 @@
           <a:bodyPr wrap="square" rtlCol="0" anchor="ctr"/>
           <a:lstStyle/>
           <a:p>
-            <a:pPr indent="0" marL="0">
+            <a:pPr marL="0" indent="0">
               <a:spcAft>
                 <a:spcPts val="200"/>
               </a:spcAft>
@@ -11660,7 +11083,7 @@
           <a:bodyPr wrap="square" rtlCol="0" anchor="ctr"/>
           <a:lstStyle/>
           <a:p>
-            <a:pPr indent="0" marL="0">
+            <a:pPr marL="0" indent="0">
               <a:buNone/>
             </a:pPr>
             <a:r>
@@ -11699,7 +11122,7 @@
           <a:bodyPr wrap="square" rtlCol="0" anchor="ctr"/>
           <a:lstStyle/>
           <a:p>
-            <a:pPr indent="0" marL="0">
+            <a:pPr marL="0" indent="0">
               <a:spcAft>
                 <a:spcPts val="200"/>
               </a:spcAft>
@@ -11804,7 +11227,7 @@
           <a:bodyPr wrap="square" rtlCol="0" anchor="ctr"/>
           <a:lstStyle/>
           <a:p>
-            <a:pPr indent="0" marL="0">
+            <a:pPr marL="0" indent="0">
               <a:buNone/>
             </a:pPr>
             <a:r>
@@ -11843,7 +11266,7 @@
           <a:bodyPr wrap="square" rtlCol="0" anchor="ctr"/>
           <a:lstStyle/>
           <a:p>
-            <a:pPr algn="r" indent="0" marL="0">
+            <a:pPr marL="0" indent="0" algn="r">
               <a:buNone/>
             </a:pPr>
             <a:r>
@@ -11877,6 +11300,7 @@
         <a:solidFill>
           <a:srgbClr val="FFFFFF"/>
         </a:solidFill>
+        <a:effectLst/>
       </p:bgPr>
     </p:bg>
     <p:spTree>
@@ -11914,7 +11338,7 @@
           <a:bodyPr wrap="square" lIns="0" tIns="0" rIns="0" bIns="0" rtlCol="0" anchor="ctr"/>
           <a:lstStyle/>
           <a:p>
-            <a:pPr indent="0" marL="0">
+            <a:pPr marL="0" indent="0">
               <a:buNone/>
             </a:pPr>
             <a:r>
@@ -11953,7 +11377,7 @@
           <a:bodyPr wrap="square" lIns="0" tIns="0" rIns="0" bIns="0" rtlCol="0" anchor="ctr"/>
           <a:lstStyle/>
           <a:p>
-            <a:pPr indent="0" marL="0">
+            <a:pPr marL="0" indent="0">
               <a:buNone/>
             </a:pPr>
             <a:r>
@@ -12019,7 +11443,7 @@
           <a:bodyPr wrap="square" rtlCol="0" anchor="ctr"/>
           <a:lstStyle/>
           <a:p>
-            <a:pPr indent="0" marL="0">
+            <a:pPr marL="0" indent="0">
               <a:buNone/>
             </a:pPr>
             <a:r>
@@ -12191,7 +11615,7 @@
           <a:bodyPr wrap="square" rtlCol="0" anchor="ctr"/>
           <a:lstStyle/>
           <a:p>
-            <a:pPr algn="r" indent="0" marL="0">
+            <a:pPr marL="0" indent="0" algn="r">
               <a:buNone/>
             </a:pPr>
             <a:r>
@@ -12230,7 +11654,7 @@
           <a:bodyPr wrap="square" rtlCol="0" anchor="ctr"/>
           <a:lstStyle/>
           <a:p>
-            <a:pPr algn="ctr" indent="0" marL="0">
+            <a:pPr marL="0" indent="0" algn="ctr">
               <a:buNone/>
             </a:pPr>
             <a:r>
@@ -12296,7 +11720,7 @@
           <a:bodyPr wrap="square" rtlCol="0" anchor="ctr"/>
           <a:lstStyle/>
           <a:p>
-            <a:pPr indent="0" marL="0">
+            <a:pPr marL="0" indent="0">
               <a:buNone/>
             </a:pPr>
             <a:r>
@@ -12362,7 +11786,7 @@
           <a:bodyPr wrap="square" rtlCol="0" anchor="ctr"/>
           <a:lstStyle/>
           <a:p>
-            <a:pPr indent="0" marL="0">
+            <a:pPr marL="0" indent="0">
               <a:buNone/>
             </a:pPr>
             <a:r>
@@ -12401,7 +11825,7 @@
           <a:bodyPr wrap="square" rtlCol="0" anchor="ctr"/>
           <a:lstStyle/>
           <a:p>
-            <a:pPr indent="0" marL="0">
+            <a:pPr marL="0" indent="0">
               <a:buNone/>
             </a:pPr>
             <a:r>
@@ -12440,7 +11864,7 @@
           <a:bodyPr wrap="square" rtlCol="0" anchor="ctr"/>
           <a:lstStyle/>
           <a:p>
-            <a:pPr indent="0" marL="0">
+            <a:pPr marL="0" indent="0">
               <a:buNone/>
             </a:pPr>
             <a:r>
@@ -12506,7 +11930,7 @@
           <a:bodyPr wrap="square" rtlCol="0" anchor="ctr"/>
           <a:lstStyle/>
           <a:p>
-            <a:pPr indent="0" marL="0">
+            <a:pPr marL="0" indent="0">
               <a:buNone/>
             </a:pPr>
             <a:r>
@@ -12545,7 +11969,7 @@
           <a:bodyPr wrap="square" rtlCol="0" anchor="ctr"/>
           <a:lstStyle/>
           <a:p>
-            <a:pPr indent="0" marL="0">
+            <a:pPr marL="0" indent="0">
               <a:spcAft>
                 <a:spcPts val="300"/>
               </a:spcAft>
@@ -12656,7 +12080,7 @@
           <a:bodyPr wrap="square" rtlCol="0" anchor="ctr"/>
           <a:lstStyle/>
           <a:p>
-            <a:pPr indent="0" marL="0">
+            <a:pPr marL="0" indent="0">
               <a:buNone/>
             </a:pPr>
             <a:r>
@@ -12695,7 +12119,7 @@
           <a:bodyPr wrap="square" rtlCol="0" anchor="ctr"/>
           <a:lstStyle/>
           <a:p>
-            <a:pPr indent="0" marL="0">
+            <a:pPr marL="0" indent="0">
               <a:spcAft>
                 <a:spcPts val="300"/>
               </a:spcAft>
@@ -12712,24 +12136,63 @@
               </a:rPr>
               <a:t>Аугментация </a:t>
             </a:r>
-            <a:pPr indent="0" marL="0">
+            <a:r>
+              <a:rPr lang="en-US" sz="1100" b="1" dirty="0">
+                <a:solidFill>
+                  <a:srgbClr val="2A2D34"/>
+                </a:solidFill>
+                <a:latin typeface="Calibri" pitchFamily="34" charset="0"/>
+                <a:ea typeface="Calibri" pitchFamily="34" charset="-122"/>
+                <a:cs typeface="Calibri" pitchFamily="34" charset="-120"/>
+              </a:rPr>
+              <a:t>на спектрограмме</a:t>
+            </a:r>
+            <a:r>
+              <a:rPr lang="en-US" sz="1100" dirty="0">
+                <a:solidFill>
+                  <a:srgbClr val="2A2D34"/>
+                </a:solidFill>
+                <a:latin typeface="Calibri" pitchFamily="34" charset="0"/>
+                <a:ea typeface="Calibri" pitchFamily="34" charset="-122"/>
+                <a:cs typeface="Calibri" pitchFamily="34" charset="-120"/>
+              </a:rPr>
+              <a:t> — не на wav. Это позволяет </a:t>
+            </a:r>
+            <a:r>
+              <a:rPr lang="en-US" sz="1100" b="1" dirty="0">
+                <a:solidFill>
+                  <a:srgbClr val="2A2D34"/>
+                </a:solidFill>
+                <a:latin typeface="Calibri" pitchFamily="34" charset="0"/>
+                <a:ea typeface="Calibri" pitchFamily="34" charset="-122"/>
+                <a:cs typeface="Calibri" pitchFamily="34" charset="-120"/>
+              </a:rPr>
+              <a:t>переиспользовать кеш</a:t>
+            </a:r>
+            <a:r>
+              <a:rPr lang="en-US" sz="1100" dirty="0">
+                <a:solidFill>
+                  <a:srgbClr val="2A2D34"/>
+                </a:solidFill>
+                <a:latin typeface="Calibri" pitchFamily="34" charset="0"/>
+                <a:ea typeface="Calibri" pitchFamily="34" charset="-122"/>
+                <a:cs typeface="Calibri" pitchFamily="34" charset="-120"/>
+              </a:rPr>
+              <a:t> (мелы рассчитаны 1 раз), при этом каждый mini-batch видит новый паттерн.</a:t>
+            </a:r>
+            <a:endParaRPr lang="en-US" sz="1100" dirty="0"/>
+          </a:p>
+          <a:p>
+            <a:pPr marL="0" indent="0">
               <a:spcAft>
                 <a:spcPts val="300"/>
               </a:spcAft>
               <a:buNone/>
             </a:pPr>
-            <a:r>
-              <a:rPr lang="en-US" sz="1100" b="1" dirty="0">
-                <a:solidFill>
-                  <a:srgbClr val="2A2D34"/>
-                </a:solidFill>
-                <a:latin typeface="Calibri" pitchFamily="34" charset="0"/>
-                <a:ea typeface="Calibri" pitchFamily="34" charset="-122"/>
-                <a:cs typeface="Calibri" pitchFamily="34" charset="-120"/>
-              </a:rPr>
-              <a:t>на спектрограмме</a:t>
-            </a:r>
-            <a:pPr indent="0" marL="0">
+            <a:endParaRPr lang="en-US" sz="1100" dirty="0"/>
+          </a:p>
+          <a:p>
+            <a:pPr marL="0" indent="0">
               <a:spcAft>
                 <a:spcPts val="300"/>
               </a:spcAft>
@@ -12744,69 +12207,6 @@
                 <a:ea typeface="Calibri" pitchFamily="34" charset="-122"/>
                 <a:cs typeface="Calibri" pitchFamily="34" charset="-120"/>
               </a:rPr>
-              <a:t> — не на wav. Это позволяет </a:t>
-            </a:r>
-            <a:pPr indent="0" marL="0">
-              <a:spcAft>
-                <a:spcPts val="300"/>
-              </a:spcAft>
-              <a:buNone/>
-            </a:pPr>
-            <a:r>
-              <a:rPr lang="en-US" sz="1100" b="1" dirty="0">
-                <a:solidFill>
-                  <a:srgbClr val="2A2D34"/>
-                </a:solidFill>
-                <a:latin typeface="Calibri" pitchFamily="34" charset="0"/>
-                <a:ea typeface="Calibri" pitchFamily="34" charset="-122"/>
-                <a:cs typeface="Calibri" pitchFamily="34" charset="-120"/>
-              </a:rPr>
-              <a:t>переиспользовать кеш</a:t>
-            </a:r>
-            <a:pPr indent="0" marL="0">
-              <a:spcAft>
-                <a:spcPts val="300"/>
-              </a:spcAft>
-              <a:buNone/>
-            </a:pPr>
-            <a:r>
-              <a:rPr lang="en-US" sz="1100" dirty="0">
-                <a:solidFill>
-                  <a:srgbClr val="2A2D34"/>
-                </a:solidFill>
-                <a:latin typeface="Calibri" pitchFamily="34" charset="0"/>
-                <a:ea typeface="Calibri" pitchFamily="34" charset="-122"/>
-                <a:cs typeface="Calibri" pitchFamily="34" charset="-120"/>
-              </a:rPr>
-              <a:t> (мелы рассчитаны 1 раз), при этом каждый mini-batch видит новый паттерн.</a:t>
-            </a:r>
-            <a:endParaRPr lang="en-US" sz="1100" dirty="0"/>
-          </a:p>
-          <a:p>
-            <a:pPr indent="0" marL="0">
-              <a:spcAft>
-                <a:spcPts val="300"/>
-              </a:spcAft>
-              <a:buNone/>
-            </a:pPr>
-            <a:endParaRPr lang="en-US" sz="1100" dirty="0"/>
-          </a:p>
-          <a:p>
-            <a:pPr indent="0" marL="0">
-              <a:spcAft>
-                <a:spcPts val="300"/>
-              </a:spcAft>
-              <a:buNone/>
-            </a:pPr>
-            <a:r>
-              <a:rPr lang="en-US" sz="1100" dirty="0">
-                <a:solidFill>
-                  <a:srgbClr val="2A2D34"/>
-                </a:solidFill>
-                <a:latin typeface="Calibri" pitchFamily="34" charset="0"/>
-                <a:ea typeface="Calibri" pitchFamily="34" charset="-122"/>
-                <a:cs typeface="Calibri" pitchFamily="34" charset="-120"/>
-              </a:rPr>
               <a:t>Pitch-shift / time-stretch — медленнее и не дают выигрыша на этой задаче.</a:t>
             </a:r>
             <a:endParaRPr lang="en-US" sz="1100" dirty="0"/>
@@ -12834,7 +12234,7 @@
           <a:bodyPr wrap="square" rtlCol="0" anchor="ctr"/>
           <a:lstStyle/>
           <a:p>
-            <a:pPr indent="0" marL="0">
+            <a:pPr marL="0" indent="0">
               <a:buNone/>
             </a:pPr>
             <a:r>
@@ -12873,7 +12273,7 @@
           <a:bodyPr wrap="square" rtlCol="0" anchor="ctr"/>
           <a:lstStyle/>
           <a:p>
-            <a:pPr algn="r" indent="0" marL="0">
+            <a:pPr marL="0" indent="0" algn="r">
               <a:buNone/>
             </a:pPr>
             <a:r>
@@ -12907,6 +12307,7 @@
         <a:solidFill>
           <a:srgbClr val="FFFFFF"/>
         </a:solidFill>
+        <a:effectLst/>
       </p:bgPr>
     </p:bg>
     <p:spTree>
@@ -12944,7 +12345,7 @@
           <a:bodyPr wrap="square" lIns="0" tIns="0" rIns="0" bIns="0" rtlCol="0" anchor="ctr"/>
           <a:lstStyle/>
           <a:p>
-            <a:pPr indent="0" marL="0">
+            <a:pPr marL="0" indent="0">
               <a:buNone/>
             </a:pPr>
             <a:r>
@@ -13060,7 +12461,7 @@
           <a:bodyPr wrap="square" rtlCol="0" anchor="ctr"/>
           <a:lstStyle/>
           <a:p>
-            <a:pPr algn="ctr" indent="0" marL="0">
+            <a:pPr marL="0" indent="0" algn="ctr">
               <a:buNone/>
             </a:pPr>
             <a:r>
@@ -13099,7 +12500,7 @@
           <a:bodyPr wrap="square" rtlCol="0" anchor="ctr"/>
           <a:lstStyle/>
           <a:p>
-            <a:pPr indent="0" marL="0">
+            <a:pPr marL="0" indent="0">
               <a:buNone/>
             </a:pPr>
             <a:r>
@@ -13138,7 +12539,7 @@
           <a:bodyPr wrap="square" rtlCol="0" anchor="ctr"/>
           <a:lstStyle/>
           <a:p>
-            <a:pPr indent="0" marL="0">
+            <a:pPr marL="0" indent="0">
               <a:buNone/>
             </a:pPr>
             <a:r>
@@ -13152,9 +12553,6 @@
               </a:rPr>
               <a:t>Симптом: </a:t>
             </a:r>
-            <a:pPr indent="0" marL="0">
-              <a:buNone/>
-            </a:pPr>
             <a:r>
               <a:rPr lang="en-US" sz="1100" dirty="0">
                 <a:solidFill>
@@ -13191,7 +12589,7 @@
           <a:bodyPr wrap="square" rtlCol="0" anchor="ctr"/>
           <a:lstStyle/>
           <a:p>
-            <a:pPr indent="0" marL="0">
+            <a:pPr marL="0" indent="0">
               <a:buNone/>
             </a:pPr>
             <a:r>
@@ -13205,9 +12603,6 @@
               </a:rPr>
               <a:t>Решение: </a:t>
             </a:r>
-            <a:pPr indent="0" marL="0">
-              <a:buNone/>
-            </a:pPr>
             <a:r>
               <a:rPr lang="en-US" sz="1100" dirty="0">
                 <a:solidFill>
@@ -13321,7 +12716,7 @@
           <a:bodyPr wrap="square" rtlCol="0" anchor="ctr"/>
           <a:lstStyle/>
           <a:p>
-            <a:pPr algn="ctr" indent="0" marL="0">
+            <a:pPr marL="0" indent="0" algn="ctr">
               <a:buNone/>
             </a:pPr>
             <a:r>
@@ -13360,7 +12755,7 @@
           <a:bodyPr wrap="square" rtlCol="0" anchor="ctr"/>
           <a:lstStyle/>
           <a:p>
-            <a:pPr indent="0" marL="0">
+            <a:pPr marL="0" indent="0">
               <a:buNone/>
             </a:pPr>
             <a:r>
@@ -13399,7 +12794,7 @@
           <a:bodyPr wrap="square" rtlCol="0" anchor="ctr"/>
           <a:lstStyle/>
           <a:p>
-            <a:pPr indent="0" marL="0">
+            <a:pPr marL="0" indent="0">
               <a:buNone/>
             </a:pPr>
             <a:r>
@@ -13413,9 +12808,6 @@
               </a:rPr>
               <a:t>Симптом: </a:t>
             </a:r>
-            <a:pPr indent="0" marL="0">
-              <a:buNone/>
-            </a:pPr>
             <a:r>
               <a:rPr lang="en-US" sz="1100" dirty="0">
                 <a:solidFill>
@@ -13452,7 +12844,7 @@
           <a:bodyPr wrap="square" rtlCol="0" anchor="ctr"/>
           <a:lstStyle/>
           <a:p>
-            <a:pPr indent="0" marL="0">
+            <a:pPr marL="0" indent="0">
               <a:buNone/>
             </a:pPr>
             <a:r>
@@ -13466,9 +12858,6 @@
               </a:rPr>
               <a:t>Решение: </a:t>
             </a:r>
-            <a:pPr indent="0" marL="0">
-              <a:buNone/>
-            </a:pPr>
             <a:r>
               <a:rPr lang="en-US" sz="1100" dirty="0">
                 <a:solidFill>
@@ -13582,7 +12971,7 @@
           <a:bodyPr wrap="square" rtlCol="0" anchor="ctr"/>
           <a:lstStyle/>
           <a:p>
-            <a:pPr algn="ctr" indent="0" marL="0">
+            <a:pPr marL="0" indent="0" algn="ctr">
               <a:buNone/>
             </a:pPr>
             <a:r>
@@ -13621,7 +13010,7 @@
           <a:bodyPr wrap="square" rtlCol="0" anchor="ctr"/>
           <a:lstStyle/>
           <a:p>
-            <a:pPr indent="0" marL="0">
+            <a:pPr marL="0" indent="0">
               <a:buNone/>
             </a:pPr>
             <a:r>
@@ -13660,7 +13049,7 @@
           <a:bodyPr wrap="square" rtlCol="0" anchor="ctr"/>
           <a:lstStyle/>
           <a:p>
-            <a:pPr indent="0" marL="0">
+            <a:pPr marL="0" indent="0">
               <a:buNone/>
             </a:pPr>
             <a:r>
@@ -13674,9 +13063,6 @@
               </a:rPr>
               <a:t>Симптом: </a:t>
             </a:r>
-            <a:pPr indent="0" marL="0">
-              <a:buNone/>
-            </a:pPr>
             <a:r>
               <a:rPr lang="en-US" sz="1100" dirty="0">
                 <a:solidFill>
@@ -13713,7 +13099,7 @@
           <a:bodyPr wrap="square" rtlCol="0" anchor="ctr"/>
           <a:lstStyle/>
           <a:p>
-            <a:pPr indent="0" marL="0">
+            <a:pPr marL="0" indent="0">
               <a:buNone/>
             </a:pPr>
             <a:r>
@@ -13727,9 +13113,6 @@
               </a:rPr>
               <a:t>Решение: </a:t>
             </a:r>
-            <a:pPr indent="0" marL="0">
-              <a:buNone/>
-            </a:pPr>
             <a:r>
               <a:rPr lang="en-US" sz="1100" dirty="0">
                 <a:solidFill>
@@ -13766,7 +13149,7 @@
           <a:bodyPr wrap="square" rtlCol="0" anchor="ctr"/>
           <a:lstStyle/>
           <a:p>
-            <a:pPr indent="0" marL="0">
+            <a:pPr marL="0" indent="0">
               <a:buNone/>
             </a:pPr>
             <a:r>
@@ -13805,7 +13188,7 @@
           <a:bodyPr wrap="square" rtlCol="0" anchor="ctr"/>
           <a:lstStyle/>
           <a:p>
-            <a:pPr algn="r" indent="0" marL="0">
+            <a:pPr marL="0" indent="0" algn="r">
               <a:buNone/>
             </a:pPr>
             <a:r>
@@ -14124,4 +13507,265 @@
     </a:ext>
   </a:extLst>
 </a:theme>
+</file>
+
+<file path=ppt/theme/theme2.xml><?xml version="1.0" encoding="utf-8"?>
+<a:theme xmlns:a="http://schemas.openxmlformats.org/drawingml/2006/main" name="Тема Office">
+  <a:themeElements>
+    <a:clrScheme name="Стандартная">
+      <a:dk1>
+        <a:sysClr val="windowText" lastClr="000000"/>
+      </a:dk1>
+      <a:lt1>
+        <a:sysClr val="window" lastClr="FFFFFF"/>
+      </a:lt1>
+      <a:dk2>
+        <a:srgbClr val="44546A"/>
+      </a:dk2>
+      <a:lt2>
+        <a:srgbClr val="E7E6E6"/>
+      </a:lt2>
+      <a:accent1>
+        <a:srgbClr val="5B9BD5"/>
+      </a:accent1>
+      <a:accent2>
+        <a:srgbClr val="ED7D31"/>
+      </a:accent2>
+      <a:accent3>
+        <a:srgbClr val="A5A5A5"/>
+      </a:accent3>
+      <a:accent4>
+        <a:srgbClr val="FFC000"/>
+      </a:accent4>
+      <a:accent5>
+        <a:srgbClr val="4472C4"/>
+      </a:accent5>
+      <a:accent6>
+        <a:srgbClr val="70AD47"/>
+      </a:accent6>
+      <a:hlink>
+        <a:srgbClr val="0563C1"/>
+      </a:hlink>
+      <a:folHlink>
+        <a:srgbClr val="954F72"/>
+      </a:folHlink>
+    </a:clrScheme>
+    <a:fontScheme name="Стандартная">
+      <a:majorFont>
+        <a:latin typeface="Calibri Light" panose="020F0302020204030204"/>
+        <a:ea typeface=""/>
+        <a:cs typeface=""/>
+        <a:font script="Jpan" typeface="ＭＳ Ｐゴシック"/>
+        <a:font script="Hang" typeface="맑은 고딕"/>
+        <a:font script="Hans" typeface="宋体"/>
+        <a:font script="Hant" typeface="新細明體"/>
+        <a:font script="Arab" typeface="Times New Roman"/>
+        <a:font script="Hebr" typeface="Times New Roman"/>
+        <a:font script="Thai" typeface="Angsana New"/>
+        <a:font script="Ethi" typeface="Nyala"/>
+        <a:font script="Beng" typeface="Vrinda"/>
+        <a:font script="Gujr" typeface="Shruti"/>
+        <a:font script="Khmr" typeface="MoolBoran"/>
+        <a:font script="Knda" typeface="Tunga"/>
+        <a:font script="Guru" typeface="Raavi"/>
+        <a:font script="Cans" typeface="Euphemia"/>
+        <a:font script="Cher" typeface="Plantagenet Cherokee"/>
+        <a:font script="Yiii" typeface="Microsoft Yi Baiti"/>
+        <a:font script="Tibt" typeface="Microsoft Himalaya"/>
+        <a:font script="Thaa" typeface="MV Boli"/>
+        <a:font script="Deva" typeface="Mangal"/>
+        <a:font script="Telu" typeface="Gautami"/>
+        <a:font script="Taml" typeface="Latha"/>
+        <a:font script="Syrc" typeface="Estrangelo Edessa"/>
+        <a:font script="Orya" typeface="Kalinga"/>
+        <a:font script="Mlym" typeface="Kartika"/>
+        <a:font script="Laoo" typeface="DokChampa"/>
+        <a:font script="Sinh" typeface="Iskoola Pota"/>
+        <a:font script="Mong" typeface="Mongolian Baiti"/>
+        <a:font script="Viet" typeface="Times New Roman"/>
+        <a:font script="Uigh" typeface="Microsoft Uighur"/>
+        <a:font script="Geor" typeface="Sylfaen"/>
+      </a:majorFont>
+      <a:minorFont>
+        <a:latin typeface="Calibri" panose="020F0502020204030204"/>
+        <a:ea typeface=""/>
+        <a:cs typeface=""/>
+        <a:font script="Jpan" typeface="ＭＳ Ｐゴシック"/>
+        <a:font script="Hang" typeface="맑은 고딕"/>
+        <a:font script="Hans" typeface="宋体"/>
+        <a:font script="Hant" typeface="新細明體"/>
+        <a:font script="Arab" typeface="Arial"/>
+        <a:font script="Hebr" typeface="Arial"/>
+        <a:font script="Thai" typeface="Cordia New"/>
+        <a:font script="Ethi" typeface="Nyala"/>
+        <a:font script="Beng" typeface="Vrinda"/>
+        <a:font script="Gujr" typeface="Shruti"/>
+        <a:font script="Khmr" typeface="DaunPenh"/>
+        <a:font script="Knda" typeface="Tunga"/>
+        <a:font script="Guru" typeface="Raavi"/>
+        <a:font script="Cans" typeface="Euphemia"/>
+        <a:font script="Cher" typeface="Plantagenet Cherokee"/>
+        <a:font script="Yiii" typeface="Microsoft Yi Baiti"/>
+        <a:font script="Tibt" typeface="Microsoft Himalaya"/>
+        <a:font script="Thaa" typeface="MV Boli"/>
+        <a:font script="Deva" typeface="Mangal"/>
+        <a:font script="Telu" typeface="Gautami"/>
+        <a:font script="Taml" typeface="Latha"/>
+        <a:font script="Syrc" typeface="Estrangelo Edessa"/>
+        <a:font script="Orya" typeface="Kalinga"/>
+        <a:font script="Mlym" typeface="Kartika"/>
+        <a:font script="Laoo" typeface="DokChampa"/>
+        <a:font script="Sinh" typeface="Iskoola Pota"/>
+        <a:font script="Mong" typeface="Mongolian Baiti"/>
+        <a:font script="Viet" typeface="Arial"/>
+        <a:font script="Uigh" typeface="Microsoft Uighur"/>
+        <a:font script="Geor" typeface="Sylfaen"/>
+      </a:minorFont>
+    </a:fontScheme>
+    <a:fmtScheme name="Стандартная">
+      <a:fillStyleLst>
+        <a:solidFill>
+          <a:schemeClr val="phClr"/>
+        </a:solidFill>
+        <a:gradFill rotWithShape="1">
+          <a:gsLst>
+            <a:gs pos="0">
+              <a:schemeClr val="phClr">
+                <a:lumMod val="110000"/>
+                <a:satMod val="105000"/>
+                <a:tint val="67000"/>
+              </a:schemeClr>
+            </a:gs>
+            <a:gs pos="50000">
+              <a:schemeClr val="phClr">
+                <a:lumMod val="105000"/>
+                <a:satMod val="103000"/>
+                <a:tint val="73000"/>
+              </a:schemeClr>
+            </a:gs>
+            <a:gs pos="100000">
+              <a:schemeClr val="phClr">
+                <a:lumMod val="105000"/>
+                <a:satMod val="109000"/>
+                <a:tint val="81000"/>
+              </a:schemeClr>
+            </a:gs>
+          </a:gsLst>
+          <a:lin ang="5400000" scaled="0"/>
+        </a:gradFill>
+        <a:gradFill rotWithShape="1">
+          <a:gsLst>
+            <a:gs pos="0">
+              <a:schemeClr val="phClr">
+                <a:satMod val="103000"/>
+                <a:lumMod val="102000"/>
+                <a:tint val="94000"/>
+              </a:schemeClr>
+            </a:gs>
+            <a:gs pos="50000">
+              <a:schemeClr val="phClr">
+                <a:satMod val="110000"/>
+                <a:lumMod val="100000"/>
+                <a:shade val="100000"/>
+              </a:schemeClr>
+            </a:gs>
+            <a:gs pos="100000">
+              <a:schemeClr val="phClr">
+                <a:lumMod val="99000"/>
+                <a:satMod val="120000"/>
+                <a:shade val="78000"/>
+              </a:schemeClr>
+            </a:gs>
+          </a:gsLst>
+          <a:lin ang="5400000" scaled="0"/>
+        </a:gradFill>
+      </a:fillStyleLst>
+      <a:lnStyleLst>
+        <a:ln w="6350" cap="flat" cmpd="sng" algn="ctr">
+          <a:solidFill>
+            <a:schemeClr val="phClr"/>
+          </a:solidFill>
+          <a:prstDash val="solid"/>
+          <a:miter lim="800000"/>
+        </a:ln>
+        <a:ln w="12700" cap="flat" cmpd="sng" algn="ctr">
+          <a:solidFill>
+            <a:schemeClr val="phClr"/>
+          </a:solidFill>
+          <a:prstDash val="solid"/>
+          <a:miter lim="800000"/>
+        </a:ln>
+        <a:ln w="19050" cap="flat" cmpd="sng" algn="ctr">
+          <a:solidFill>
+            <a:schemeClr val="phClr"/>
+          </a:solidFill>
+          <a:prstDash val="solid"/>
+          <a:miter lim="800000"/>
+        </a:ln>
+      </a:lnStyleLst>
+      <a:effectStyleLst>
+        <a:effectStyle>
+          <a:effectLst/>
+        </a:effectStyle>
+        <a:effectStyle>
+          <a:effectLst/>
+        </a:effectStyle>
+        <a:effectStyle>
+          <a:effectLst>
+            <a:outerShdw blurRad="57150" dist="19050" dir="5400000" algn="ctr" rotWithShape="0">
+              <a:srgbClr val="000000">
+                <a:alpha val="63000"/>
+              </a:srgbClr>
+            </a:outerShdw>
+          </a:effectLst>
+        </a:effectStyle>
+      </a:effectStyleLst>
+      <a:bgFillStyleLst>
+        <a:solidFill>
+          <a:schemeClr val="phClr"/>
+        </a:solidFill>
+        <a:solidFill>
+          <a:schemeClr val="phClr">
+            <a:tint val="95000"/>
+            <a:satMod val="170000"/>
+          </a:schemeClr>
+        </a:solidFill>
+        <a:gradFill rotWithShape="1">
+          <a:gsLst>
+            <a:gs pos="0">
+              <a:schemeClr val="phClr">
+                <a:tint val="93000"/>
+                <a:satMod val="150000"/>
+                <a:shade val="98000"/>
+                <a:lumMod val="102000"/>
+              </a:schemeClr>
+            </a:gs>
+            <a:gs pos="50000">
+              <a:schemeClr val="phClr">
+                <a:tint val="98000"/>
+                <a:satMod val="130000"/>
+                <a:shade val="90000"/>
+                <a:lumMod val="103000"/>
+              </a:schemeClr>
+            </a:gs>
+            <a:gs pos="100000">
+              <a:schemeClr val="phClr">
+                <a:shade val="63000"/>
+                <a:satMod val="120000"/>
+              </a:schemeClr>
+            </a:gs>
+          </a:gsLst>
+          <a:lin ang="5400000" scaled="0"/>
+        </a:gradFill>
+      </a:bgFillStyleLst>
+    </a:fmtScheme>
+  </a:themeElements>
+  <a:objectDefaults/>
+  <a:extraClrSchemeLst/>
+  <a:extLst>
+    <a:ext uri="{05A4C25C-085E-4340-85A3-A5531E510DB2}">
+      <thm15:themeFamily xmlns:thm15="http://schemas.microsoft.com/office/thememl/2012/main" name="Office Theme" id="{62F939B6-93AF-4DB8-9C6B-D6C7DFDC589F}" vid="{4A3C46E8-61CC-4603-A589-7422A47A8E4A}"/>
+    </a:ext>
+  </a:extLst>
+</a:theme>
 </file>